--- a/attached_assets/ThriveUp_ACOS_PitchDeck_GrandFounders.pptx
+++ b/attached_assets/ThriveUp_ACOS_PitchDeck_GrandFounders.pptx
@@ -506,7 +506,51 @@
           <a:p>
             <a:r>
               <a:rPr lang="en-US" dirty="0"/>
-              <a:t/>
+              <a:t>SLIDE 1 — WHO WE ARE
+  The Collaborative Advocate (formerly Integrated Services and Solutions) is a veteran-founded, Black-led technology company based in Austin, TX.
+  We build an ecosystem of ecosystems — 23 interdependent platforms that make companies, people, and organizations better by enabling them to:
+  - See themselves clearly (data, dashboards, health metrics)
+  - Execute with fidelity (governance, implementation science, compliance)
+  - Understand the world around them (community data, risk mapping, market intelligence)
+  - Consider dynamics and effects (cross-domain impact analysis, orchestration)
+  Founder: Dr. Terry Flood — Veteran, serial entrepreneur, CEO
+  Email: mr.terryflood@gmail.com
+  Hub: thrivingcommunitiesforall.com
+  THREE FLAGSHIP ECOSYSTEMS:
+  1. ThriveUp Academy (thrivingcommunitiesforall.com) — Workforce development, training pipelines, grant readiness, skill alignment. The hub of the 23-platform ACOS.
+  2. Shield Atlas (shield-atlas.replit.app) — Emergency response, risk detection, crisis coordination, continuity planning, community resilience scoring. Geographic risk mapping across all hazard types.
+  3. AGOS Core (partner ecosystem) — Adaptive Growth Operating System. Sovereign partner ecosystem that collaborates bilaterally with ThriveUp. Has contributed 5 adopted improvements: Confidence Drift Detection, Load Absorption Protocol, Bilateral Exchange Direction, Pre-Build Gate Enforcement, and Capability Orchestration Map. Proof that our collaboration model works — iron sharpens iron.
+  ALL 23 PLATFORM URLs:
+  NON-REPLIT DOMAINS:
+  • thrivingcommunitiesforall.com — ThriveUp Academy (Hub)
+  • mentalwellnesssupport.net — Whole-Person Health
+  • implementationineducatio.com — WholeMind (K-12 Education)
+  • yourhealthbirthright.net — Sankofa Health
+  • safereports.net — SafeReport
+  • vetmissiontransition.com — M2C (Military-to-Civilian)
+  • lifetransitionsaid.org — LifeBridge (Virtual 211)
+  • minoritycenterofexcellence.com — MCE (Minority Center of Excellence)
+  • bettersciencelab.com — Better Science Lab / RPLICE
+  • safecognicare.com — SafeCogniCare
+  • pillscheduler.net — PillScheduler
+  • neurodifferentassistant.app — Perfectly Different
+  REPLIT-HOSTED (deploying to custom domains):
+  • shield-atlas.replit.app — Shield Atlas
+  • holistic-black-feminine-health-hub.replit.app — Sankofa Feminine Health
+  • black-maternal-health-network.replit.app — Sankofa Maternal Health
+  • black-men-health.replit.app — Black Men's Health
+  • life-pals-standalone.replit.app — Life Pals (ISSS)
+  • the-colaberitive-advocate--mrterryflood.replit.app — Collaborative Advocate
+  • video-creator-ai-mrterryflood.replit.app — Video Creator AI
+  • ecosystem-nexus.replit.app — Ecosystem Nexus
+  • advertising-targeting-for-platforms.replit.app — Ad Targeting
+  • pinnacle-business-conglomerate.replit.app — Pinnacle Business Conglomerate
+  • speech-bridge-mrterryflood.replit.app — Speech Bridge
+  • autoimmune-thrive.replit.app — Autoimmune Thrive
+  AGOS CORE (Partner Ecosystem):
+  • Sovereign partner — bilateral collaboration exchange every 8 hours
+  • 5 improvements adopted into ThriveUp from AGOS collaboration
+  • Model: Observe → Ask → Collaborate → Grow</a:t>
             </a:r>
             <a:endParaRPr lang="en-US" dirty="0"/>
           </a:p>
@@ -594,7 +638,26 @@
           <a:p>
             <a:r>
               <a:rPr lang="en-US" dirty="0"/>
-              <a:t/>
+              <a:t>SLIDE 2 — THE PROBLEM
+  This is NOT a technology problem. It's a coordination problem.
+  FOR PEOPLE:
+  - A veteran leaving service has to navigate VA benefits, job training, housing, mental health, family support, and education — all through separate, disconnected systems
+  - Same for job seekers, people with chronic conditions, families in crisis
+  - The systems exist. They just don't talk to each other. People fall through the gaps.
+  FOR COMPANIES:
+  - Fortune 500s spend millions on workforce development, DEI, and community investment with no way to measure real outcomes
+  - They can't see their own workforce pipelines clearly
+  - Community engagement is compliance theater, not strategic capability
+  FOR GOVERNMENT:
+  - City, state, and federal agencies run hundreds of programs that don't coordinate
+  - WIOA, HHS, VA, DOL, SAMHSA — all funding programs that overlap and compete instead of collaborating
+  - No shared data infrastructure. No cross-agency visibility. No way to know what's working.
+  THE VALIDATION:
+  - MIT Sloan Management Review (2021-2026) has published extensive research defining "workforce ecosystems" as the future
+  - Their definition: "A structure focused on value creation that consists of complementarities and interdependencies — encompassing actors from within organizations and beyond"
+  - That's exactly what we built — and we did it before they published the research
+  KEY TALKING POINT:
+  Shield Atlas handles the emergency/safety layer. ThriveUp handles workforce/training. AGOS proved the collaboration model works between sovereign ecosystems. Together, this is what MIT is describing — but operational, not theoretical.</a:t>
             </a:r>
             <a:endParaRPr lang="en-US" dirty="0"/>
           </a:p>
@@ -682,7 +745,43 @@
           <a:p>
             <a:r>
               <a:rPr lang="en-US" dirty="0"/>
-              <a:t/>
+              <a:t>SLIDE 3 — WHAT WE BUILT
+  THE THREE FLAGSHIPS:
+  1. ThriveUp Academy (thrivingcommunitiesforall.com)
+     - The hub. 23-platform ACOS (Adaptive Coordinated Operating System)
+     - Workforce training, skill alignment, grant readiness, program design
+     - Every platform monitors, supports, and improves every other platform — autonomously
+     - 7-triad team-of-teams architecture with co-captain failover
+     - Pre-Build Gate: no capability gets built until the ecosystem proves it doesn't already exist
+     - Capability Orchestration Map: every use case has a Lead, Support, and Validate assignment
+  2. Shield Atlas
+     - Emergency response and community resilience platform
+     - Geographic risk mapping, crisis coordination, continuity planning
+     - Real-time risk detection across all hazard types
+     - Integrates with FEMA, weather services, community alert systems
+     - The safety layer that ensures no platform operates without crisis awareness
+  3. AGOS Core (Partner Ecosystem)
+     - Adaptive Growth Operating System — a sovereign, independent ecosystem
+     - Collaborates with ThriveUp via bilateral exchange every 8 hours
+     - Has contributed 5 improvements we adopted:
+       a. Confidence Drift Detection — tracks earned trust over time
+       b. Load Absorption Protocol — healthiest platform absorbs critical work from downed partners
+       c. Bilateral Exchange Direction — structured two-way information flow
+       d. Pre-Build Gate Enforcement — prevents building what already exists
+       e. Capability Orchestration Map — who leads, who supports, who validates
+     - This partnership PROVES the model works across ecosystem boundaries
+     - Model: Observe → Ask → Collaborate → Grow
+  SUPPORTING PLATFORMS (20 more):
+  - Veteran Services: M2C (vetmissiontransition.com), Collaborative Advocate
+  - Health Equity: Whole-Person Health (mentalwellnesssupport.net), Sankofa (yourhealthbirthright.net), PillScheduler (pillscheduler.net), SafeCogniCare (safecognicare.com), Sankofa Feminine Health, Sankofa Maternal Health, Black Men's Health, Autoimmune Thrive
+  - Business: MCE (minoritycenterofexcellence.com) — 656K+ SAM.gov records, Pinnacle Business Conglomerate
+  - Community: LifeBridge (lifetransitionsaid.org) — Virtual 211, community resources
+  - Education: WholeMind (implementationineducatio.com), Life Pals/ISSS, Perfectly Different (neurodifferentassistant.app)
+  - Operations: Ecosystem Nexus, Better Science Lab (bettersciencelab.com), Video Creator AI, Ad Targeting, Speech Bridge, SafeReport (safereports.net)
+  HOW IT WORKS FOR CLIENTS:
+  - For Individuals: Everything is free. Always. Veterans, job seekers, patients, families — no cost ever.
+  - For Companies: Enterprise licensing. Deploy the ecosystem for workforce pipelines, community investment, DEI measurement.
+  - For Government: Grant-funded or contracted deployment. City, state, federal. WIOA, HHS, VA alignment.</a:t>
             </a:r>
             <a:endParaRPr lang="en-US" dirty="0"/>
           </a:p>
@@ -770,7 +869,36 @@
           <a:p>
             <a:r>
               <a:rPr lang="en-US" dirty="0"/>
-              <a:t/>
+              <a:t>SLIDE 4 — TRACTION &amp; REAL TALK
+  TRACTION:
+  - 23 platforms built. This is not a prototype. It's a working system.
+  - 16 of 23 are online and serving users today. 7 are in final deployment.
+  - 4 active grants in pipeline: WIOA ($200K–$500K), Foundation ($100K–$500K), St. David's (up to $1M), SSG Fox VA ($750K)
+  - Live bilateral collaboration exchange with AGOS Core — two ecosystems sharing improvements every 8 hours
+  - 5 improvements adopted from AGOS into ThriveUp's core operating system — this proves the collaboration model works
+  - Capability portfolio is live and ready for enterprise buyers
+  - 750+ API routes across the ecosystem, 5,200+ testable UI components
+  - Pre-Build Gate and Capability Orchestration Map enforce quality and prevent duplication
+  FAILURES — THEY ASKED FOR THIS AND WE'RE BEING REAL:
+  1. INTEGRATED SERVICES AND SOLUTIONS (the previous company name)
+     - Started with the right mission but the wrong architecture
+     - Tried to solve everything under one brand with no ecosystem thinking
+     - It didn't work. Had to rebrand to The Collaborative Advocate and rebuild from the ground up.
+  2. SILO THINKING
+     - Built platforms independently for years. They didn't talk to each other.
+     - No shared data, no coordination, no handoffs
+     - Had to tear it down and build the ACOS connector architecture from scratch
+  3. LACK OF PLANNING AND COORDINATION
+     - Jumped into building features without checking if they already existed
+     - Duplicated work across platforms multiple times
+     - This failure is EXACTLY why the Pre-Build Gate now exists — it forces the system to search before building
+     - And why the Capability Orchestration Map exists — it assigns Lead, Support, Validate for every capability
+  4. UNDERPRICING
+     - Made everything free — including the enterprise value
+     - Fortune 500 companies pay McKinsey and Deloitte millions for workforce ecosystem strategy
+     - We built the actual operating system and didn't charge for it
+     - That's changing. Enterprise licensing, government contracts, and strategic partnerships are the revenue model now.
+  KEY POINT: Every failure taught me something that became a core feature of the platform. The system exists BECAUSE I failed, not despite it.</a:t>
             </a:r>
             <a:endParaRPr lang="en-US" dirty="0"/>
           </a:p>
@@ -858,7 +986,61 @@
           <a:p>
             <a:r>
               <a:rPr lang="en-US" dirty="0"/>
-              <a:t/>
+              <a:t>SLIDE 5 — THE ASK
+  TWO 90-DAY GOALS:
+  GOAL 1: Secure $1.5M–$2.5M in Enterprise or Government Contracts
+  - Deploy the ThriveUp ACOS ecosystem across 2-3 organizations
+  - Target sectors: veteran transition services, municipal workforce development, Fortune 500 community investment programs
+  - We currently have 4 active grants in pipeline (WIOA $200K–$500K, Foundation $100K–$500K, St. David's up to $1M, SSG Fox VA $750K)
+  - We have a live 23-platform ecosystem — we need strategic partners who can accelerate deployment at scale
+  - 30% achievable without the program: grant pipeline is already moving
+  GOAL 2: Strategic Partnerships for Government Modernization
+  - Establish 2-3 partnerships with Fortune 500 companies or family offices
+  - License the ACOS framework for government operations — city, state, and federal
+  - Shield Atlas handles emergency. ThriveUp handles workforce. AGOS proves the collaboration model.
+  - Together, this changes how governments coordinate workforce, emergency response, and community services
+  - 30% achievable without the program: we're already in conversations with government entities
+  WHY THIS WORKS:
+  1. We have a working system, not a slide deck — 23 live platforms
+  2. AGOS Core partnership proves cross-ecosystem collaboration works — 5 adopted improvements
+  3. Shield Atlas proves we handle safety-critical operations at scale
+  4. Every failure became a feature: silos → ACOS architecture. No planning → Pre-Build Gate. Underpricing → enterprise licensing model
+  THE REAL STORY:
+  I started as Integrated Services and Solutions. I failed multiple times because I didn't have the planning, the coordination, or the ecosystem thinking. Each failure taught me something. I rebranded to The Collaborative Advocate because the name says what we do — we advocate through collaboration, not isolation.
+  Now I have 23 platforms that coordinate autonomously, a partner ecosystem (AGOS) that pushes us to be better, and Shield Atlas ensuring safety is never an afterthought. MIT Sloan is publishing papers about what we've already built.
+  What I need is the right people in the room. That's what I'm here for.
+  CONTACT:
+  Email: mr.terryflood@gmail.com
+  Web: thrivingcommunitiesforall.com
+  Cash App: $MRTDFLOOD
+  PayPal: paypal.me/TERRYFLOODCEO
+  ALL PLATFORM URLs (for due diligence):
+  Custom Domains:
+  • thrivingcommunitiesforall.com — ThriveUp Academy (Hub)
+  • mentalwellnesssupport.net — Whole-Person Health
+  • implementationineducatio.com — WholeMind
+  • yourhealthbirthright.net — Sankofa Health
+  • safereports.net — SafeReport
+  • vetmissiontransition.com — M2C
+  • lifetransitionsaid.org — LifeBridge
+  • minoritycenterofexcellence.com — MCE
+  • bettersciencelab.com — Better Science Lab
+  • safecognicare.com — SafeCogniCare
+  • pillscheduler.net — PillScheduler
+  • neurodifferentassistant.app — Perfectly Different
+  Deploying:
+  • shield-atlas.replit.app — Shield Atlas
+  • holistic-black-feminine-health-hub.replit.app — Sankofa Feminine Health
+  • black-maternal-health-network.replit.app — Sankofa Maternal Health
+  • black-men-health.replit.app — Black Men's Health
+  • life-pals-standalone.replit.app — ISSS
+  • the-colaberitive-advocate--mrterryflood.replit.app — Collaborative Advocate
+  • video-creator-ai-mrterryflood.replit.app — Video Creator AI
+  • ecosystem-nexus.replit.app — Ecosystem Nexus
+  • advertising-targeting-for-platforms.replit.app — Ad Targeting
+  • pinnacle-business-conglomerate.replit.app — Pinnacle Business
+  • speech-bridge-mrterryflood.replit.app — Speech Bridge
+  • autoimmune-thrive.replit.app — Autoimmune Thrive</a:t>
             </a:r>
             <a:endParaRPr lang="en-US" dirty="0"/>
           </a:p>
@@ -1259,24 +1441,24 @@
         </p:nvSpPr>
         <p:spPr>
           <a:xfrm>
-            <a:off x="731520" y="548640"/>
-            <a:ext cx="10058400" cy="457200"/>
-          </a:xfrm>
-          <a:prstGeom prst="rect">
-            <a:avLst/>
-          </a:prstGeom>
-          <a:noFill/>
-          <a:ln/>
-        </p:spPr>
-        <p:txBody>
-          <a:bodyPr wrap="square" rtlCol="0" anchor="ctr"/>
-          <a:lstStyle/>
-          <a:p>
-            <a:pPr indent="0" marL="0">
-              <a:buNone/>
-            </a:pPr>
-            <a:r>
-              <a:rPr lang="en-US" sz="1400" b="1" dirty="0">
+            <a:off x="731520" y="457200"/>
+            <a:ext cx="10058400" cy="411480"/>
+          </a:xfrm>
+          <a:prstGeom prst="rect">
+            <a:avLst/>
+          </a:prstGeom>
+          <a:noFill/>
+          <a:ln/>
+        </p:spPr>
+        <p:txBody>
+          <a:bodyPr wrap="square" rtlCol="0" anchor="ctr"/>
+          <a:lstStyle/>
+          <a:p>
+            <a:pPr indent="0" marL="0">
+              <a:buNone/>
+            </a:pPr>
+            <a:r>
+              <a:rPr lang="en-US" sz="1300" b="1" dirty="0">
                 <a:solidFill>
                   <a:srgbClr val="2D7FF9"/>
                 </a:solidFill>
@@ -1286,7 +1468,7 @@
               </a:rPr>
               <a:t>THE COLLABORATIVE ADVOCATE</a:t>
             </a:r>
-            <a:endParaRPr lang="en-US" sz="1400" dirty="0"/>
+            <a:endParaRPr lang="en-US" sz="1300" dirty="0"/>
           </a:p>
         </p:txBody>
       </p:sp>
@@ -1298,24 +1480,24 @@
         </p:nvSpPr>
         <p:spPr>
           <a:xfrm>
-            <a:off x="731520" y="1097280"/>
-            <a:ext cx="10058400" cy="914400"/>
-          </a:xfrm>
-          <a:prstGeom prst="rect">
-            <a:avLst/>
-          </a:prstGeom>
-          <a:noFill/>
-          <a:ln/>
-        </p:spPr>
-        <p:txBody>
-          <a:bodyPr wrap="square" rtlCol="0" anchor="ctr"/>
-          <a:lstStyle/>
-          <a:p>
-            <a:pPr indent="0" marL="0">
-              <a:buNone/>
-            </a:pPr>
-            <a:r>
-              <a:rPr lang="en-US" sz="3800" b="1" dirty="0">
+            <a:off x="731520" y="1005840"/>
+            <a:ext cx="10058400" cy="731520"/>
+          </a:xfrm>
+          <a:prstGeom prst="rect">
+            <a:avLst/>
+          </a:prstGeom>
+          <a:noFill/>
+          <a:ln/>
+        </p:spPr>
+        <p:txBody>
+          <a:bodyPr wrap="square" rtlCol="0" anchor="ctr"/>
+          <a:lstStyle/>
+          <a:p>
+            <a:pPr indent="0" marL="0">
+              <a:buNone/>
+            </a:pPr>
+            <a:r>
+              <a:rPr lang="en-US" sz="3600" b="1" dirty="0">
                 <a:solidFill>
                   <a:srgbClr val="FFFFFF"/>
                 </a:solidFill>
@@ -1323,9 +1505,9 @@
                 <a:ea typeface="Arial" pitchFamily="34" charset="-122"/>
                 <a:cs typeface="Arial" pitchFamily="34" charset="-120"/>
               </a:rPr>
-              <a:t>ThriveUp ACOS Ecosystem</a:t>
-            </a:r>
-            <a:endParaRPr lang="en-US" sz="3800" dirty="0"/>
+              <a:t>An Ecosystem of Ecosystems</a:t>
+            </a:r>
+            <a:endParaRPr lang="en-US" sz="3600" dirty="0"/>
           </a:p>
         </p:txBody>
       </p:sp>
@@ -1337,24 +1519,27 @@
         </p:nvSpPr>
         <p:spPr>
           <a:xfrm>
-            <a:off x="731520" y="2011680"/>
-            <a:ext cx="9144000" cy="548640"/>
-          </a:xfrm>
-          <a:prstGeom prst="rect">
-            <a:avLst/>
-          </a:prstGeom>
-          <a:noFill/>
-          <a:ln/>
-        </p:spPr>
-        <p:txBody>
-          <a:bodyPr wrap="square" rtlCol="0" anchor="ctr"/>
-          <a:lstStyle/>
-          <a:p>
-            <a:pPr indent="0" marL="0">
-              <a:buNone/>
-            </a:pPr>
-            <a:r>
-              <a:rPr lang="en-US" sz="1800" i="1" dirty="0">
+            <a:off x="731520" y="1828800"/>
+            <a:ext cx="10058400" cy="822960"/>
+          </a:xfrm>
+          <a:prstGeom prst="rect">
+            <a:avLst/>
+          </a:prstGeom>
+          <a:noFill/>
+          <a:ln/>
+        </p:spPr>
+        <p:txBody>
+          <a:bodyPr wrap="square" rtlCol="0" anchor="ctr"/>
+          <a:lstStyle/>
+          <a:p>
+            <a:pPr indent="0" marL="0">
+              <a:lnSpc>
+                <a:spcPct val="135000"/>
+              </a:lnSpc>
+              <a:buNone/>
+            </a:pPr>
+            <a:r>
+              <a:rPr lang="en-US" sz="1500" i="1" dirty="0">
                 <a:solidFill>
                   <a:srgbClr val="94A3B8"/>
                 </a:solidFill>
@@ -1362,9 +1547,49 @@
                 <a:ea typeface="Arial" pitchFamily="34" charset="-122"/>
                 <a:cs typeface="Arial" pitchFamily="34" charset="-120"/>
               </a:rPr>
-              <a:t>23 Platforms. One Mission. The Future of Workforce — Already Built.</a:t>
-            </a:r>
-            <a:endParaRPr lang="en-US" sz="1800" dirty="0"/>
+              <a:t>We make companies, people, and organizations better — by enabling them to</a:t>
+            </a:r>
+            <a:endParaRPr lang="en-US" sz="1500" dirty="0"/>
+          </a:p>
+          <a:p>
+            <a:pPr indent="0" marL="0">
+              <a:lnSpc>
+                <a:spcPct val="135000"/>
+              </a:lnSpc>
+              <a:buNone/>
+            </a:pPr>
+            <a:r>
+              <a:rPr lang="en-US" sz="1500" i="1" dirty="0">
+                <a:solidFill>
+                  <a:srgbClr val="94A3B8"/>
+                </a:solidFill>
+                <a:latin typeface="Arial" pitchFamily="34" charset="0"/>
+                <a:ea typeface="Arial" pitchFamily="34" charset="-122"/>
+                <a:cs typeface="Arial" pitchFamily="34" charset="-120"/>
+              </a:rPr>
+              <a:t>see themselves, execute with fidelity, understand the world around them,</a:t>
+            </a:r>
+            <a:endParaRPr lang="en-US" sz="1500" dirty="0"/>
+          </a:p>
+          <a:p>
+            <a:pPr indent="0" marL="0">
+              <a:lnSpc>
+                <a:spcPct val="135000"/>
+              </a:lnSpc>
+              <a:buNone/>
+            </a:pPr>
+            <a:r>
+              <a:rPr lang="en-US" sz="1500" i="1" dirty="0">
+                <a:solidFill>
+                  <a:srgbClr val="94A3B8"/>
+                </a:solidFill>
+                <a:latin typeface="Arial" pitchFamily="34" charset="0"/>
+                <a:ea typeface="Arial" pitchFamily="34" charset="-122"/>
+                <a:cs typeface="Arial" pitchFamily="34" charset="-120"/>
+              </a:rPr>
+              <a:t>and consider the dynamics and effects of every decision.</a:t>
+            </a:r>
+            <a:endParaRPr lang="en-US" sz="1500" dirty="0"/>
           </a:p>
         </p:txBody>
       </p:sp>
@@ -1377,7 +1602,7 @@
         <p:spPr>
           <a:xfrm>
             <a:off x="731520" y="2926080"/>
-            <a:ext cx="1371600" cy="36576"/>
+            <a:ext cx="1828800" cy="36576"/>
           </a:xfrm>
           <a:prstGeom prst="rect">
             <a:avLst/>
@@ -1397,7 +1622,7 @@
         <p:spPr>
           <a:xfrm>
             <a:off x="731520" y="3200400"/>
-            <a:ext cx="5486400" cy="1097280"/>
+            <a:ext cx="5029200" cy="1188720"/>
           </a:xfrm>
           <a:prstGeom prst="rect">
             <a:avLst/>
@@ -1442,7 +1667,7 @@
               <a:buNone/>
             </a:pPr>
             <a:r>
-              <a:rPr lang="en-US" sz="1300" dirty="0">
+              <a:rPr lang="en-US" sz="1200" dirty="0">
                 <a:solidFill>
                   <a:srgbClr val="94A3B8"/>
                 </a:solidFill>
@@ -1450,7 +1675,7 @@
                 <a:ea typeface="Arial" pitchFamily="34" charset="-122"/>
                 <a:cs typeface="Arial" pitchFamily="34" charset="-120"/>
               </a:rPr>
-              <a:t>Founder &amp; CEO</a:t>
+              <a:t>Founder &amp; CEO  |  Veteran  |  Black Founder</a:t>
             </a:r>
             <a:endParaRPr lang="en-US" sz="1600" dirty="0"/>
           </a:p>
@@ -1479,7 +1704,7 @@
                 <a:ea typeface="Arial" pitchFamily="34" charset="-122"/>
                 <a:cs typeface="Arial" pitchFamily="34" charset="-120"/>
               </a:rPr>
-              <a:t>Austin, TX  |  Veteran  |  Black Founder</a:t>
+              <a:t>Austin, TX</a:t>
             </a:r>
             <a:endParaRPr lang="en-US" sz="1600" dirty="0"/>
           </a:p>
@@ -1512,6 +1737,35 @@
             </a:r>
             <a:endParaRPr lang="en-US" sz="1600" dirty="0"/>
           </a:p>
+          <a:p>
+            <a:pPr indent="0" marL="0">
+              <a:lnSpc>
+                <a:spcPct val="130000"/>
+              </a:lnSpc>
+              <a:buNone/>
+            </a:pPr>
+            <a:endParaRPr lang="en-US" sz="1600" dirty="0"/>
+          </a:p>
+          <a:p>
+            <a:pPr indent="0" marL="0">
+              <a:lnSpc>
+                <a:spcPct val="130000"/>
+              </a:lnSpc>
+              <a:buNone/>
+            </a:pPr>
+            <a:r>
+              <a:rPr lang="en-US" sz="1200" dirty="0">
+                <a:solidFill>
+                  <a:srgbClr val="2D7FF9"/>
+                </a:solidFill>
+                <a:latin typeface="Arial" pitchFamily="34" charset="0"/>
+                <a:ea typeface="Arial" pitchFamily="34" charset="-122"/>
+                <a:cs typeface="Arial" pitchFamily="34" charset="-120"/>
+              </a:rPr>
+              <a:t>thrivingcommunitiesforall.com</a:t>
+            </a:r>
+            <a:endParaRPr lang="en-US" sz="1600" dirty="0"/>
+          </a:p>
         </p:txBody>
       </p:sp>
       <p:sp>
@@ -1522,117 +1776,246 @@
         </p:nvSpPr>
         <p:spPr>
           <a:xfrm>
-            <a:off x="6858000" y="3017520"/>
-            <a:ext cx="4572000" cy="1463040"/>
-          </a:xfrm>
-          <a:prstGeom prst="rect">
-            <a:avLst/>
-          </a:prstGeom>
-          <a:noFill/>
-          <a:ln/>
-        </p:spPr>
-        <p:txBody>
-          <a:bodyPr wrap="square" rtlCol="0" anchor="ctr"/>
-          <a:lstStyle/>
-          <a:p>
-            <a:pPr indent="0" marL="0">
-              <a:lnSpc>
-                <a:spcPct val="120000"/>
-              </a:lnSpc>
-              <a:buNone/>
-            </a:pPr>
-            <a:r>
-              <a:rPr lang="en-US" sz="1300" i="1" dirty="0">
-                <a:solidFill>
-                  <a:srgbClr val="F59E0B"/>
-                </a:solidFill>
-                <a:latin typeface="Arial" pitchFamily="34" charset="0"/>
-                <a:ea typeface="Arial" pitchFamily="34" charset="-122"/>
-                <a:cs typeface="Arial" pitchFamily="34" charset="-120"/>
-              </a:rPr>
-              <a:t>"Not a one-trick pony —</a:t>
-            </a:r>
-            <a:endParaRPr lang="en-US" sz="1300" dirty="0"/>
-          </a:p>
-          <a:p>
-            <a:pPr indent="0" marL="0">
-              <a:lnSpc>
-                <a:spcPct val="120000"/>
-              </a:lnSpc>
-              <a:buNone/>
-            </a:pPr>
-            <a:r>
-              <a:rPr lang="en-US" sz="1300" i="1" dirty="0">
-                <a:solidFill>
-                  <a:srgbClr val="F59E0B"/>
-                </a:solidFill>
-                <a:latin typeface="Arial" pitchFamily="34" charset="0"/>
-                <a:ea typeface="Arial" pitchFamily="34" charset="-122"/>
-                <a:cs typeface="Arial" pitchFamily="34" charset="-120"/>
-              </a:rPr>
-              <a:t>a powerful ecosystem that solves</a:t>
-            </a:r>
-            <a:endParaRPr lang="en-US" sz="1300" dirty="0"/>
-          </a:p>
-          <a:p>
-            <a:pPr indent="0" marL="0">
-              <a:lnSpc>
-                <a:spcPct val="120000"/>
-              </a:lnSpc>
-              <a:buNone/>
-            </a:pPr>
-            <a:r>
-              <a:rPr lang="en-US" sz="1300" i="1" dirty="0">
-                <a:solidFill>
-                  <a:srgbClr val="F59E0B"/>
-                </a:solidFill>
-                <a:latin typeface="Arial" pitchFamily="34" charset="0"/>
-                <a:ea typeface="Arial" pitchFamily="34" charset="-122"/>
-                <a:cs typeface="Arial" pitchFamily="34" charset="-120"/>
-              </a:rPr>
-              <a:t>the toughest problems in an</a:t>
-            </a:r>
-            <a:endParaRPr lang="en-US" sz="1300" dirty="0"/>
-          </a:p>
-          <a:p>
-            <a:pPr indent="0" marL="0">
-              <a:lnSpc>
-                <a:spcPct val="120000"/>
-              </a:lnSpc>
-              <a:buNone/>
-            </a:pPr>
-            <a:r>
-              <a:rPr lang="en-US" sz="1300" i="1" dirty="0">
-                <a:solidFill>
-                  <a:srgbClr val="F59E0B"/>
-                </a:solidFill>
-                <a:latin typeface="Arial" pitchFamily="34" charset="0"/>
-                <a:ea typeface="Arial" pitchFamily="34" charset="-122"/>
-                <a:cs typeface="Arial" pitchFamily="34" charset="-120"/>
-              </a:rPr>
-              <a:t>empathetic way with an</a:t>
-            </a:r>
-            <a:endParaRPr lang="en-US" sz="1300" dirty="0"/>
-          </a:p>
-          <a:p>
-            <a:pPr indent="0" marL="0">
-              <a:lnSpc>
-                <a:spcPct val="120000"/>
-              </a:lnSpc>
-              <a:buNone/>
-            </a:pPr>
-            <a:r>
-              <a:rPr lang="en-US" sz="1300" i="1" dirty="0">
-                <a:solidFill>
-                  <a:srgbClr val="F59E0B"/>
-                </a:solidFill>
-                <a:latin typeface="Arial" pitchFamily="34" charset="0"/>
-                <a:ea typeface="Arial" pitchFamily="34" charset="-122"/>
-                <a:cs typeface="Arial" pitchFamily="34" charset="-120"/>
-              </a:rPr>
-              <a:t>equity-focused lens."</a:t>
-            </a:r>
-            <a:endParaRPr lang="en-US" sz="1300" dirty="0"/>
+            <a:off x="6583680" y="3017520"/>
+            <a:ext cx="4572000" cy="274320"/>
+          </a:xfrm>
+          <a:prstGeom prst="rect">
+            <a:avLst/>
+          </a:prstGeom>
+          <a:noFill/>
+          <a:ln/>
+        </p:spPr>
+        <p:txBody>
+          <a:bodyPr wrap="square" rtlCol="0" anchor="ctr"/>
+          <a:lstStyle/>
+          <a:p>
+            <a:pPr indent="0" marL="0">
+              <a:buNone/>
+            </a:pPr>
+            <a:r>
+              <a:rPr lang="en-US" sz="1000" b="1" dirty="0">
+                <a:solidFill>
+                  <a:srgbClr val="2D7FF9"/>
+                </a:solidFill>
+                <a:latin typeface="Arial" pitchFamily="34" charset="0"/>
+                <a:ea typeface="Arial" pitchFamily="34" charset="-122"/>
+                <a:cs typeface="Arial" pitchFamily="34" charset="-120"/>
+              </a:rPr>
+              <a:t>KEY ROLES</a:t>
+            </a:r>
+            <a:endParaRPr lang="en-US" sz="1000" dirty="0"/>
+          </a:p>
+        </p:txBody>
+      </p:sp>
+      <p:sp>
+        <p:nvSpPr>
+          <p:cNvPr id="9" name="Text 7"/>
+          <p:cNvSpPr/>
+          <p:nvPr/>
+        </p:nvSpPr>
+        <p:spPr>
+          <a:xfrm>
+            <a:off x="6583680" y="3337560"/>
+            <a:ext cx="4846320" cy="256032"/>
+          </a:xfrm>
+          <a:prstGeom prst="rect">
+            <a:avLst/>
+          </a:prstGeom>
+          <a:noFill/>
+          <a:ln/>
+        </p:spPr>
+        <p:txBody>
+          <a:bodyPr wrap="square" rtlCol="0" anchor="ctr"/>
+          <a:lstStyle/>
+          <a:p>
+            <a:pPr indent="0" marL="0">
+              <a:buNone/>
+            </a:pPr>
+            <a:r>
+              <a:rPr lang="en-US" sz="1000" b="1" dirty="0">
+                <a:solidFill>
+                  <a:srgbClr val="FFFFFF"/>
+                </a:solidFill>
+                <a:latin typeface="Arial" pitchFamily="34" charset="0"/>
+                <a:ea typeface="Arial" pitchFamily="34" charset="-122"/>
+                <a:cs typeface="Arial" pitchFamily="34" charset="-120"/>
+              </a:rPr>
+              <a:t>Technology: </a:t>
+            </a:r>
+            <a:pPr indent="0" marL="0">
+              <a:buNone/>
+            </a:pPr>
+            <a:r>
+              <a:rPr lang="en-US" sz="950" dirty="0">
+                <a:solidFill>
+                  <a:srgbClr val="94A3B8"/>
+                </a:solidFill>
+                <a:latin typeface="Arial" pitchFamily="34" charset="0"/>
+                <a:ea typeface="Arial" pitchFamily="34" charset="-122"/>
+                <a:cs typeface="Arial" pitchFamily="34" charset="-120"/>
+              </a:rPr>
+              <a:t>23-platform ACOS architecture — self-healing, autonomous coordination</a:t>
+            </a:r>
+            <a:endParaRPr lang="en-US" sz="1000" dirty="0"/>
+          </a:p>
+        </p:txBody>
+      </p:sp>
+      <p:sp>
+        <p:nvSpPr>
+          <p:cNvPr id="10" name="Text 8"/>
+          <p:cNvSpPr/>
+          <p:nvPr/>
+        </p:nvSpPr>
+        <p:spPr>
+          <a:xfrm>
+            <a:off x="6583680" y="3630168"/>
+            <a:ext cx="4846320" cy="256032"/>
+          </a:xfrm>
+          <a:prstGeom prst="rect">
+            <a:avLst/>
+          </a:prstGeom>
+          <a:noFill/>
+          <a:ln/>
+        </p:spPr>
+        <p:txBody>
+          <a:bodyPr wrap="square" rtlCol="0" anchor="ctr"/>
+          <a:lstStyle/>
+          <a:p>
+            <a:pPr indent="0" marL="0">
+              <a:buNone/>
+            </a:pPr>
+            <a:r>
+              <a:rPr lang="en-US" sz="1000" b="1" dirty="0">
+                <a:solidFill>
+                  <a:srgbClr val="FFFFFF"/>
+                </a:solidFill>
+                <a:latin typeface="Arial" pitchFamily="34" charset="0"/>
+                <a:ea typeface="Arial" pitchFamily="34" charset="-122"/>
+                <a:cs typeface="Arial" pitchFamily="34" charset="-120"/>
+              </a:rPr>
+              <a:t>Revenue: </a:t>
+            </a:r>
+            <a:pPr indent="0" marL="0">
+              <a:buNone/>
+            </a:pPr>
+            <a:r>
+              <a:rPr lang="en-US" sz="950" dirty="0">
+                <a:solidFill>
+                  <a:srgbClr val="94A3B8"/>
+                </a:solidFill>
+                <a:latin typeface="Arial" pitchFamily="34" charset="0"/>
+                <a:ea typeface="Arial" pitchFamily="34" charset="-122"/>
+                <a:cs typeface="Arial" pitchFamily="34" charset="-120"/>
+              </a:rPr>
+              <a:t>Enterprise licensing, government contracts, grant-funded deployments</a:t>
+            </a:r>
+            <a:endParaRPr lang="en-US" sz="1000" dirty="0"/>
+          </a:p>
+        </p:txBody>
+      </p:sp>
+      <p:sp>
+        <p:nvSpPr>
+          <p:cNvPr id="11" name="Text 9"/>
+          <p:cNvSpPr/>
+          <p:nvPr/>
+        </p:nvSpPr>
+        <p:spPr>
+          <a:xfrm>
+            <a:off x="6583680" y="3922776"/>
+            <a:ext cx="4846320" cy="256032"/>
+          </a:xfrm>
+          <a:prstGeom prst="rect">
+            <a:avLst/>
+          </a:prstGeom>
+          <a:noFill/>
+          <a:ln/>
+        </p:spPr>
+        <p:txBody>
+          <a:bodyPr wrap="square" rtlCol="0" anchor="ctr"/>
+          <a:lstStyle/>
+          <a:p>
+            <a:pPr indent="0" marL="0">
+              <a:buNone/>
+            </a:pPr>
+            <a:r>
+              <a:rPr lang="en-US" sz="1000" b="1" dirty="0">
+                <a:solidFill>
+                  <a:srgbClr val="FFFFFF"/>
+                </a:solidFill>
+                <a:latin typeface="Arial" pitchFamily="34" charset="0"/>
+                <a:ea typeface="Arial" pitchFamily="34" charset="-122"/>
+                <a:cs typeface="Arial" pitchFamily="34" charset="-120"/>
+              </a:rPr>
+              <a:t>Human Capital: </a:t>
+            </a:r>
+            <a:pPr indent="0" marL="0">
+              <a:buNone/>
+            </a:pPr>
+            <a:r>
+              <a:rPr lang="en-US" sz="950" dirty="0">
+                <a:solidFill>
+                  <a:srgbClr val="94A3B8"/>
+                </a:solidFill>
+                <a:latin typeface="Arial" pitchFamily="34" charset="0"/>
+                <a:ea typeface="Arial" pitchFamily="34" charset="-122"/>
+                <a:cs typeface="Arial" pitchFamily="34" charset="-120"/>
+              </a:rPr>
+              <a:t>Workforce pipeline across veteran, health equity, and community sectors</a:t>
+            </a:r>
+            <a:endParaRPr lang="en-US" sz="1000" dirty="0"/>
+          </a:p>
+        </p:txBody>
+      </p:sp>
+      <p:sp>
+        <p:nvSpPr>
+          <p:cNvPr id="12" name="Text 10"/>
+          <p:cNvSpPr/>
+          <p:nvPr/>
+        </p:nvSpPr>
+        <p:spPr>
+          <a:xfrm>
+            <a:off x="6583680" y="4215384"/>
+            <a:ext cx="4846320" cy="256032"/>
+          </a:xfrm>
+          <a:prstGeom prst="rect">
+            <a:avLst/>
+          </a:prstGeom>
+          <a:noFill/>
+          <a:ln/>
+        </p:spPr>
+        <p:txBody>
+          <a:bodyPr wrap="square" rtlCol="0" anchor="ctr"/>
+          <a:lstStyle/>
+          <a:p>
+            <a:pPr indent="0" marL="0">
+              <a:buNone/>
+            </a:pPr>
+            <a:r>
+              <a:rPr lang="en-US" sz="1000" b="1" dirty="0">
+                <a:solidFill>
+                  <a:srgbClr val="FFFFFF"/>
+                </a:solidFill>
+                <a:latin typeface="Arial" pitchFamily="34" charset="0"/>
+                <a:ea typeface="Arial" pitchFamily="34" charset="-122"/>
+                <a:cs typeface="Arial" pitchFamily="34" charset="-120"/>
+              </a:rPr>
+              <a:t>Investments: </a:t>
+            </a:r>
+            <a:pPr indent="0" marL="0">
+              <a:buNone/>
+            </a:pPr>
+            <a:r>
+              <a:rPr lang="en-US" sz="950" dirty="0">
+                <a:solidFill>
+                  <a:srgbClr val="94A3B8"/>
+                </a:solidFill>
+                <a:latin typeface="Arial" pitchFamily="34" charset="0"/>
+                <a:ea typeface="Arial" pitchFamily="34" charset="-122"/>
+                <a:cs typeface="Arial" pitchFamily="34" charset="-120"/>
+              </a:rPr>
+              <a:t>4 active grants in pipeline ($200K–$1M each); seeking strategic capital partners</a:t>
+            </a:r>
+            <a:endParaRPr lang="en-US" sz="1000" dirty="0"/>
           </a:p>
         </p:txBody>
       </p:sp>
@@ -1683,7 +2066,7 @@
             <a:avLst/>
           </a:prstGeom>
           <a:solidFill>
-            <a:srgbClr val="2D7FF9"/>
+            <a:srgbClr val="EF4444"/>
           </a:solidFill>
           <a:ln/>
         </p:spPr>
@@ -1697,25 +2080,25 @@
         <p:spPr>
           <a:xfrm>
             <a:off x="731520" y="365760"/>
-            <a:ext cx="10058400" cy="457200"/>
-          </a:xfrm>
-          <a:prstGeom prst="rect">
-            <a:avLst/>
-          </a:prstGeom>
-          <a:noFill/>
-          <a:ln/>
-        </p:spPr>
-        <p:txBody>
-          <a:bodyPr wrap="square" rtlCol="0" anchor="ctr"/>
-          <a:lstStyle/>
-          <a:p>
-            <a:pPr indent="0" marL="0">
-              <a:buNone/>
-            </a:pPr>
-            <a:r>
-              <a:rPr lang="en-US" sz="1400" b="1" dirty="0">
-                <a:solidFill>
-                  <a:srgbClr val="2D7FF9"/>
+            <a:ext cx="10058400" cy="411480"/>
+          </a:xfrm>
+          <a:prstGeom prst="rect">
+            <a:avLst/>
+          </a:prstGeom>
+          <a:noFill/>
+          <a:ln/>
+        </p:spPr>
+        <p:txBody>
+          <a:bodyPr wrap="square" rtlCol="0" anchor="ctr"/>
+          <a:lstStyle/>
+          <a:p>
+            <a:pPr indent="0" marL="0">
+              <a:buNone/>
+            </a:pPr>
+            <a:r>
+              <a:rPr lang="en-US" sz="1300" b="1" dirty="0">
+                <a:solidFill>
+                  <a:srgbClr val="EF4444"/>
                 </a:solidFill>
                 <a:latin typeface="Arial" pitchFamily="34" charset="0"/>
                 <a:ea typeface="Arial" pitchFamily="34" charset="-122"/>
@@ -1723,7 +2106,7 @@
               </a:rPr>
               <a:t>THE PROBLEM</a:t>
             </a:r>
-            <a:endParaRPr lang="en-US" sz="1400" dirty="0"/>
+            <a:endParaRPr lang="en-US" sz="1300" dirty="0"/>
           </a:p>
         </p:txBody>
       </p:sp>
@@ -1736,7 +2119,7 @@
         <p:spPr>
           <a:xfrm>
             <a:off x="731520" y="914400"/>
-            <a:ext cx="10058400" cy="822960"/>
+            <a:ext cx="10058400" cy="731520"/>
           </a:xfrm>
           <a:prstGeom prst="rect">
             <a:avLst/>
@@ -1750,12 +2133,12 @@
           <a:p>
             <a:pPr indent="0" marL="0">
               <a:lnSpc>
-                <a:spcPct val="120000"/>
+                <a:spcPct val="125000"/>
               </a:lnSpc>
               <a:buNone/>
             </a:pPr>
             <a:r>
-              <a:rPr lang="en-US" sz="2400" b="1" dirty="0">
+              <a:rPr lang="en-US" sz="2100" b="1" dirty="0">
                 <a:solidFill>
                   <a:srgbClr val="FFFFFF"/>
                 </a:solidFill>
@@ -1763,19 +2146,19 @@
                 <a:ea typeface="Arial" pitchFamily="34" charset="-122"/>
                 <a:cs typeface="Arial" pitchFamily="34" charset="-120"/>
               </a:rPr>
-              <a:t>Workforce systems are broken into silos.</a:t>
-            </a:r>
-            <a:endParaRPr lang="en-US" sz="2400" dirty="0"/>
+              <a:t>People, companies, and governments operate in silos.</a:t>
+            </a:r>
+            <a:endParaRPr lang="en-US" sz="2100" dirty="0"/>
           </a:p>
           <a:p>
             <a:pPr indent="0" marL="0">
               <a:lnSpc>
-                <a:spcPct val="120000"/>
+                <a:spcPct val="125000"/>
               </a:lnSpc>
               <a:buNone/>
             </a:pPr>
             <a:r>
-              <a:rPr lang="en-US" sz="2400" b="1" dirty="0">
+              <a:rPr lang="en-US" sz="2100" b="1" dirty="0">
                 <a:solidFill>
                   <a:srgbClr val="FFFFFF"/>
                 </a:solidFill>
@@ -1783,9 +2166,9 @@
                 <a:ea typeface="Arial" pitchFamily="34" charset="-122"/>
                 <a:cs typeface="Arial" pitchFamily="34" charset="-120"/>
               </a:rPr>
-              <a:t>People fall through the gaps.</a:t>
-            </a:r>
-            <a:endParaRPr lang="en-US" sz="2400" dirty="0"/>
+              <a:t>They can't see themselves. They can't coordinate. People fall through.</a:t>
+            </a:r>
+            <a:endParaRPr lang="en-US" sz="2100" dirty="0"/>
           </a:p>
         </p:txBody>
       </p:sp>
@@ -1797,8 +2180,210 @@
         </p:nvSpPr>
         <p:spPr>
           <a:xfrm>
-            <a:off x="731520" y="2011680"/>
-            <a:ext cx="54864" cy="502920"/>
+            <a:off x="731520" y="1920240"/>
+            <a:ext cx="54864" cy="640080"/>
+          </a:xfrm>
+          <a:prstGeom prst="rect">
+            <a:avLst/>
+          </a:prstGeom>
+          <a:solidFill>
+            <a:srgbClr val="EF4444"/>
+          </a:solidFill>
+          <a:ln/>
+        </p:spPr>
+      </p:sp>
+      <p:sp>
+        <p:nvSpPr>
+          <p:cNvPr id="6" name="Text 4"/>
+          <p:cNvSpPr/>
+          <p:nvPr/>
+        </p:nvSpPr>
+        <p:spPr>
+          <a:xfrm>
+            <a:off x="1051560" y="1920240"/>
+            <a:ext cx="2743200" cy="256032"/>
+          </a:xfrm>
+          <a:prstGeom prst="rect">
+            <a:avLst/>
+          </a:prstGeom>
+          <a:noFill/>
+          <a:ln/>
+        </p:spPr>
+        <p:txBody>
+          <a:bodyPr wrap="square" rtlCol="0" anchor="ctr"/>
+          <a:lstStyle/>
+          <a:p>
+            <a:pPr indent="0" marL="0">
+              <a:buNone/>
+            </a:pPr>
+            <a:r>
+              <a:rPr lang="en-US" sz="1300" b="1" dirty="0">
+                <a:solidFill>
+                  <a:srgbClr val="EF4444"/>
+                </a:solidFill>
+                <a:latin typeface="Arial" pitchFamily="34" charset="0"/>
+                <a:ea typeface="Arial" pitchFamily="34" charset="-122"/>
+                <a:cs typeface="Arial" pitchFamily="34" charset="-120"/>
+              </a:rPr>
+              <a:t>For People</a:t>
+            </a:r>
+            <a:endParaRPr lang="en-US" sz="1300" dirty="0"/>
+          </a:p>
+        </p:txBody>
+      </p:sp>
+      <p:sp>
+        <p:nvSpPr>
+          <p:cNvPr id="7" name="Text 5"/>
+          <p:cNvSpPr/>
+          <p:nvPr/>
+        </p:nvSpPr>
+        <p:spPr>
+          <a:xfrm>
+            <a:off x="1051560" y="2176272"/>
+            <a:ext cx="10058400" cy="411480"/>
+          </a:xfrm>
+          <a:prstGeom prst="rect">
+            <a:avLst/>
+          </a:prstGeom>
+          <a:noFill/>
+          <a:ln/>
+        </p:spPr>
+        <p:txBody>
+          <a:bodyPr wrap="square" rtlCol="0" anchor="ctr"/>
+          <a:lstStyle/>
+          <a:p>
+            <a:pPr indent="0" marL="0">
+              <a:lnSpc>
+                <a:spcPct val="115000"/>
+              </a:lnSpc>
+              <a:buNone/>
+            </a:pPr>
+            <a:r>
+              <a:rPr lang="en-US" sz="1050" dirty="0">
+                <a:solidFill>
+                  <a:srgbClr val="94A3B8"/>
+                </a:solidFill>
+                <a:latin typeface="Arial" pitchFamily="34" charset="0"/>
+                <a:ea typeface="Arial" pitchFamily="34" charset="-122"/>
+                <a:cs typeface="Arial" pitchFamily="34" charset="-120"/>
+              </a:rPr>
+              <a:t>Veterans navigate 15+ disconnected systems for basic transition support. Job seekers, patients, and families hit dead ends. Most give up before they get help.</a:t>
+            </a:r>
+            <a:endParaRPr lang="en-US" sz="1050" dirty="0"/>
+          </a:p>
+        </p:txBody>
+      </p:sp>
+      <p:sp>
+        <p:nvSpPr>
+          <p:cNvPr id="8" name="Shape 6"/>
+          <p:cNvSpPr/>
+          <p:nvPr/>
+        </p:nvSpPr>
+        <p:spPr>
+          <a:xfrm>
+            <a:off x="731520" y="2724912"/>
+            <a:ext cx="54864" cy="640080"/>
+          </a:xfrm>
+          <a:prstGeom prst="rect">
+            <a:avLst/>
+          </a:prstGeom>
+          <a:solidFill>
+            <a:srgbClr val="F59E0B"/>
+          </a:solidFill>
+          <a:ln/>
+        </p:spPr>
+      </p:sp>
+      <p:sp>
+        <p:nvSpPr>
+          <p:cNvPr id="9" name="Text 7"/>
+          <p:cNvSpPr/>
+          <p:nvPr/>
+        </p:nvSpPr>
+        <p:spPr>
+          <a:xfrm>
+            <a:off x="1051560" y="2724912"/>
+            <a:ext cx="2743200" cy="256032"/>
+          </a:xfrm>
+          <a:prstGeom prst="rect">
+            <a:avLst/>
+          </a:prstGeom>
+          <a:noFill/>
+          <a:ln/>
+        </p:spPr>
+        <p:txBody>
+          <a:bodyPr wrap="square" rtlCol="0" anchor="ctr"/>
+          <a:lstStyle/>
+          <a:p>
+            <a:pPr indent="0" marL="0">
+              <a:buNone/>
+            </a:pPr>
+            <a:r>
+              <a:rPr lang="en-US" sz="1300" b="1" dirty="0">
+                <a:solidFill>
+                  <a:srgbClr val="F59E0B"/>
+                </a:solidFill>
+                <a:latin typeface="Arial" pitchFamily="34" charset="0"/>
+                <a:ea typeface="Arial" pitchFamily="34" charset="-122"/>
+                <a:cs typeface="Arial" pitchFamily="34" charset="-120"/>
+              </a:rPr>
+              <a:t>For Companies</a:t>
+            </a:r>
+            <a:endParaRPr lang="en-US" sz="1300" dirty="0"/>
+          </a:p>
+        </p:txBody>
+      </p:sp>
+      <p:sp>
+        <p:nvSpPr>
+          <p:cNvPr id="10" name="Text 8"/>
+          <p:cNvSpPr/>
+          <p:nvPr/>
+        </p:nvSpPr>
+        <p:spPr>
+          <a:xfrm>
+            <a:off x="1051560" y="2980944"/>
+            <a:ext cx="10058400" cy="411480"/>
+          </a:xfrm>
+          <a:prstGeom prst="rect">
+            <a:avLst/>
+          </a:prstGeom>
+          <a:noFill/>
+          <a:ln/>
+        </p:spPr>
+        <p:txBody>
+          <a:bodyPr wrap="square" rtlCol="0" anchor="ctr"/>
+          <a:lstStyle/>
+          <a:p>
+            <a:pPr indent="0" marL="0">
+              <a:lnSpc>
+                <a:spcPct val="115000"/>
+              </a:lnSpc>
+              <a:buNone/>
+            </a:pPr>
+            <a:r>
+              <a:rPr lang="en-US" sz="1050" dirty="0">
+                <a:solidFill>
+                  <a:srgbClr val="94A3B8"/>
+                </a:solidFill>
+                <a:latin typeface="Arial" pitchFamily="34" charset="0"/>
+                <a:ea typeface="Arial" pitchFamily="34" charset="-122"/>
+                <a:cs typeface="Arial" pitchFamily="34" charset="-120"/>
+              </a:rPr>
+              <a:t>Workforce pipelines are broken. DEI investments lack measurable outcomes. Community engagement is a checkbox, not a strategy. No visibility into impact.</a:t>
+            </a:r>
+            <a:endParaRPr lang="en-US" sz="1050" dirty="0"/>
+          </a:p>
+        </p:txBody>
+      </p:sp>
+      <p:sp>
+        <p:nvSpPr>
+          <p:cNvPr id="11" name="Shape 9"/>
+          <p:cNvSpPr/>
+          <p:nvPr/>
+        </p:nvSpPr>
+        <p:spPr>
+          <a:xfrm>
+            <a:off x="731520" y="3529584"/>
+            <a:ext cx="54864" cy="640080"/>
           </a:xfrm>
           <a:prstGeom prst="rect">
             <a:avLst/>
@@ -1811,14 +2396,14 @@
       </p:sp>
       <p:sp>
         <p:nvSpPr>
-          <p:cNvPr id="6" name="Text 4"/>
-          <p:cNvSpPr/>
-          <p:nvPr/>
-        </p:nvSpPr>
-        <p:spPr>
-          <a:xfrm>
-            <a:off x="1005840" y="1993392"/>
-            <a:ext cx="2743200" cy="274320"/>
+          <p:cNvPr id="12" name="Text 10"/>
+          <p:cNvSpPr/>
+          <p:nvPr/>
+        </p:nvSpPr>
+        <p:spPr>
+          <a:xfrm>
+            <a:off x="1051560" y="3529584"/>
+            <a:ext cx="2743200" cy="256032"/>
           </a:xfrm>
           <a:prstGeom prst="rect">
             <a:avLst/>
@@ -1836,13 +2421,13 @@
             <a:r>
               <a:rPr lang="en-US" sz="1300" b="1" dirty="0">
                 <a:solidFill>
-                  <a:srgbClr val="FFFFFF"/>
-                </a:solidFill>
-                <a:latin typeface="Arial" pitchFamily="34" charset="0"/>
-                <a:ea typeface="Arial" pitchFamily="34" charset="-122"/>
-                <a:cs typeface="Arial" pitchFamily="34" charset="-120"/>
-              </a:rPr>
-              <a:t>Fragmented Services</a:t>
+                  <a:srgbClr val="2D7FF9"/>
+                </a:solidFill>
+                <a:latin typeface="Arial" pitchFamily="34" charset="0"/>
+                <a:ea typeface="Arial" pitchFamily="34" charset="-122"/>
+                <a:cs typeface="Arial" pitchFamily="34" charset="-120"/>
+              </a:rPr>
+              <a:t>For Government</a:t>
             </a:r>
             <a:endParaRPr lang="en-US" sz="1300" dirty="0"/>
           </a:p>
@@ -1850,14 +2435,14 @@
       </p:sp>
       <p:sp>
         <p:nvSpPr>
-          <p:cNvPr id="7" name="Text 5"/>
-          <p:cNvSpPr/>
-          <p:nvPr/>
-        </p:nvSpPr>
-        <p:spPr>
-          <a:xfrm>
-            <a:off x="1005840" y="2240280"/>
-            <a:ext cx="10058400" cy="320040"/>
+          <p:cNvPr id="13" name="Text 11"/>
+          <p:cNvSpPr/>
+          <p:nvPr/>
+        </p:nvSpPr>
+        <p:spPr>
+          <a:xfrm>
+            <a:off x="1051560" y="3785616"/>
+            <a:ext cx="10058400" cy="411480"/>
           </a:xfrm>
           <a:prstGeom prst="rect">
             <a:avLst/>
@@ -1871,12 +2456,12 @@
           <a:p>
             <a:pPr indent="0" marL="0">
               <a:lnSpc>
-                <a:spcPct val="110000"/>
+                <a:spcPct val="115000"/>
               </a:lnSpc>
               <a:buNone/>
             </a:pPr>
             <a:r>
-              <a:rPr lang="en-US" sz="1100" dirty="0">
+              <a:rPr lang="en-US" sz="1050" dirty="0">
                 <a:solidFill>
                   <a:srgbClr val="94A3B8"/>
                 </a:solidFill>
@@ -1884,123 +2469,22 @@
                 <a:ea typeface="Arial" pitchFamily="34" charset="-122"/>
                 <a:cs typeface="Arial" pitchFamily="34" charset="-120"/>
               </a:rPr>
-              <a:t>Veterans, job seekers, and underserved communities navigate 15+ disconnected systems to get basic help. Most give up.</a:t>
-            </a:r>
-            <a:endParaRPr lang="en-US" sz="1100" dirty="0"/>
-          </a:p>
-        </p:txBody>
-      </p:sp>
-      <p:sp>
-        <p:nvSpPr>
-          <p:cNvPr id="8" name="Shape 6"/>
-          <p:cNvSpPr/>
-          <p:nvPr/>
-        </p:nvSpPr>
-        <p:spPr>
-          <a:xfrm>
-            <a:off x="731520" y="2697480"/>
-            <a:ext cx="54864" cy="502920"/>
-          </a:xfrm>
-          <a:prstGeom prst="rect">
-            <a:avLst/>
-          </a:prstGeom>
-          <a:solidFill>
-            <a:srgbClr val="2D7FF9"/>
-          </a:solidFill>
-          <a:ln/>
-        </p:spPr>
-      </p:sp>
-      <p:sp>
-        <p:nvSpPr>
-          <p:cNvPr id="9" name="Text 7"/>
-          <p:cNvSpPr/>
-          <p:nvPr/>
-        </p:nvSpPr>
-        <p:spPr>
-          <a:xfrm>
-            <a:off x="1005840" y="2679192"/>
-            <a:ext cx="2743200" cy="274320"/>
-          </a:xfrm>
-          <a:prstGeom prst="rect">
-            <a:avLst/>
-          </a:prstGeom>
-          <a:noFill/>
-          <a:ln/>
-        </p:spPr>
-        <p:txBody>
-          <a:bodyPr wrap="square" rtlCol="0" anchor="ctr"/>
-          <a:lstStyle/>
-          <a:p>
-            <a:pPr indent="0" marL="0">
-              <a:buNone/>
-            </a:pPr>
-            <a:r>
-              <a:rPr lang="en-US" sz="1300" b="1" dirty="0">
-                <a:solidFill>
-                  <a:srgbClr val="FFFFFF"/>
-                </a:solidFill>
-                <a:latin typeface="Arial" pitchFamily="34" charset="0"/>
-                <a:ea typeface="Arial" pitchFamily="34" charset="-122"/>
-                <a:cs typeface="Arial" pitchFamily="34" charset="-120"/>
-              </a:rPr>
-              <a:t>No Coordination</a:t>
-            </a:r>
-            <a:endParaRPr lang="en-US" sz="1300" dirty="0"/>
-          </a:p>
-        </p:txBody>
-      </p:sp>
-      <p:sp>
-        <p:nvSpPr>
-          <p:cNvPr id="10" name="Text 8"/>
-          <p:cNvSpPr/>
-          <p:nvPr/>
-        </p:nvSpPr>
-        <p:spPr>
-          <a:xfrm>
-            <a:off x="1005840" y="2926080"/>
-            <a:ext cx="10058400" cy="320040"/>
-          </a:xfrm>
-          <a:prstGeom prst="rect">
-            <a:avLst/>
-          </a:prstGeom>
-          <a:noFill/>
-          <a:ln/>
-        </p:spPr>
-        <p:txBody>
-          <a:bodyPr wrap="square" rtlCol="0" anchor="ctr"/>
-          <a:lstStyle/>
-          <a:p>
-            <a:pPr indent="0" marL="0">
-              <a:lnSpc>
-                <a:spcPct val="110000"/>
-              </a:lnSpc>
-              <a:buNone/>
-            </a:pPr>
-            <a:r>
-              <a:rPr lang="en-US" sz="1100" dirty="0">
-                <a:solidFill>
-                  <a:srgbClr val="94A3B8"/>
-                </a:solidFill>
-                <a:latin typeface="Arial" pitchFamily="34" charset="0"/>
-                <a:ea typeface="Arial" pitchFamily="34" charset="-122"/>
-                <a:cs typeface="Arial" pitchFamily="34" charset="-120"/>
-              </a:rPr>
-              <a:t>Workforce agencies, health providers, housing services, and crisis responders operate in isolation — no shared data, no handoffs.</a:t>
-            </a:r>
-            <a:endParaRPr lang="en-US" sz="1100" dirty="0"/>
-          </a:p>
-        </p:txBody>
-      </p:sp>
-      <p:sp>
-        <p:nvSpPr>
-          <p:cNvPr id="11" name="Shape 9"/>
-          <p:cNvSpPr/>
-          <p:nvPr/>
-        </p:nvSpPr>
-        <p:spPr>
-          <a:xfrm>
-            <a:off x="731520" y="3383280"/>
-            <a:ext cx="54864" cy="502920"/>
+              <a:t>City, state, and federal agencies run fragmented programs with no shared data, no cross-agency coordination, and no way to measure what's actually working.</a:t>
+            </a:r>
+            <a:endParaRPr lang="en-US" sz="1050" dirty="0"/>
+          </a:p>
+        </p:txBody>
+      </p:sp>
+      <p:sp>
+        <p:nvSpPr>
+          <p:cNvPr id="14" name="Shape 12"/>
+          <p:cNvSpPr/>
+          <p:nvPr/>
+        </p:nvSpPr>
+        <p:spPr>
+          <a:xfrm>
+            <a:off x="731520" y="4334256"/>
+            <a:ext cx="54864" cy="640080"/>
           </a:xfrm>
           <a:prstGeom prst="rect">
             <a:avLst/>
@@ -2013,14 +2497,14 @@
       </p:sp>
       <p:sp>
         <p:nvSpPr>
-          <p:cNvPr id="12" name="Text 10"/>
-          <p:cNvSpPr/>
-          <p:nvPr/>
-        </p:nvSpPr>
-        <p:spPr>
-          <a:xfrm>
-            <a:off x="1005840" y="3364992"/>
-            <a:ext cx="2743200" cy="274320"/>
+          <p:cNvPr id="15" name="Text 13"/>
+          <p:cNvSpPr/>
+          <p:nvPr/>
+        </p:nvSpPr>
+        <p:spPr>
+          <a:xfrm>
+            <a:off x="1051560" y="4334256"/>
+            <a:ext cx="2743200" cy="256032"/>
           </a:xfrm>
           <a:prstGeom prst="rect">
             <a:avLst/>
@@ -2038,13 +2522,13 @@
             <a:r>
               <a:rPr lang="en-US" sz="1300" b="1" dirty="0">
                 <a:solidFill>
-                  <a:srgbClr val="FFFFFF"/>
-                </a:solidFill>
-                <a:latin typeface="Arial" pitchFamily="34" charset="0"/>
-                <a:ea typeface="Arial" pitchFamily="34" charset="-122"/>
-                <a:cs typeface="Arial" pitchFamily="34" charset="-120"/>
-              </a:rPr>
-              <a:t>Zero Ecosystem Thinking</a:t>
+                  <a:srgbClr val="10B981"/>
+                </a:solidFill>
+                <a:latin typeface="Arial" pitchFamily="34" charset="0"/>
+                <a:ea typeface="Arial" pitchFamily="34" charset="-122"/>
+                <a:cs typeface="Arial" pitchFamily="34" charset="-120"/>
+              </a:rPr>
+              <a:t>The MIT Validation</a:t>
             </a:r>
             <a:endParaRPr lang="en-US" sz="1300" dirty="0"/>
           </a:p>
@@ -2052,14 +2536,14 @@
       </p:sp>
       <p:sp>
         <p:nvSpPr>
-          <p:cNvPr id="13" name="Text 11"/>
-          <p:cNvSpPr/>
-          <p:nvPr/>
-        </p:nvSpPr>
-        <p:spPr>
-          <a:xfrm>
-            <a:off x="1005840" y="3611880"/>
-            <a:ext cx="10058400" cy="320040"/>
+          <p:cNvPr id="16" name="Text 14"/>
+          <p:cNvSpPr/>
+          <p:nvPr/>
+        </p:nvSpPr>
+        <p:spPr>
+          <a:xfrm>
+            <a:off x="1051560" y="4590288"/>
+            <a:ext cx="10058400" cy="411480"/>
           </a:xfrm>
           <a:prstGeom prst="rect">
             <a:avLst/>
@@ -2073,12 +2557,12 @@
           <a:p>
             <a:pPr indent="0" marL="0">
               <a:lnSpc>
-                <a:spcPct val="110000"/>
+                <a:spcPct val="115000"/>
               </a:lnSpc>
               <a:buNone/>
             </a:pPr>
             <a:r>
-              <a:rPr lang="en-US" sz="1100" dirty="0">
+              <a:rPr lang="en-US" sz="1050" dirty="0">
                 <a:solidFill>
                   <a:srgbClr val="94A3B8"/>
                 </a:solidFill>
@@ -2086,110 +2570,9 @@
                 <a:ea typeface="Arial" pitchFamily="34" charset="-122"/>
                 <a:cs typeface="Arial" pitchFamily="34" charset="-120"/>
               </a:rPr>
-              <a:t>MIT Sloan calls workforce ecosystems "the future of work." 87% of executives say they need one. Almost none have built one.</a:t>
-            </a:r>
-            <a:endParaRPr lang="en-US" sz="1100" dirty="0"/>
-          </a:p>
-        </p:txBody>
-      </p:sp>
-      <p:sp>
-        <p:nvSpPr>
-          <p:cNvPr id="14" name="Shape 12"/>
-          <p:cNvSpPr/>
-          <p:nvPr/>
-        </p:nvSpPr>
-        <p:spPr>
-          <a:xfrm>
-            <a:off x="731520" y="4069080"/>
-            <a:ext cx="54864" cy="502920"/>
-          </a:xfrm>
-          <a:prstGeom prst="rect">
-            <a:avLst/>
-          </a:prstGeom>
-          <a:solidFill>
-            <a:srgbClr val="10B981"/>
-          </a:solidFill>
-          <a:ln/>
-        </p:spPr>
-      </p:sp>
-      <p:sp>
-        <p:nvSpPr>
-          <p:cNvPr id="15" name="Text 13"/>
-          <p:cNvSpPr/>
-          <p:nvPr/>
-        </p:nvSpPr>
-        <p:spPr>
-          <a:xfrm>
-            <a:off x="1005840" y="4050792"/>
-            <a:ext cx="2743200" cy="274320"/>
-          </a:xfrm>
-          <a:prstGeom prst="rect">
-            <a:avLst/>
-          </a:prstGeom>
-          <a:noFill/>
-          <a:ln/>
-        </p:spPr>
-        <p:txBody>
-          <a:bodyPr wrap="square" rtlCol="0" anchor="ctr"/>
-          <a:lstStyle/>
-          <a:p>
-            <a:pPr indent="0" marL="0">
-              <a:buNone/>
-            </a:pPr>
-            <a:r>
-              <a:rPr lang="en-US" sz="1300" b="1" dirty="0">
-                <a:solidFill>
-                  <a:srgbClr val="FFFFFF"/>
-                </a:solidFill>
-                <a:latin typeface="Arial" pitchFamily="34" charset="0"/>
-                <a:ea typeface="Arial" pitchFamily="34" charset="-122"/>
-                <a:cs typeface="Arial" pitchFamily="34" charset="-120"/>
-              </a:rPr>
-              <a:t>The Trust Gap</a:t>
-            </a:r>
-            <a:endParaRPr lang="en-US" sz="1300" dirty="0"/>
-          </a:p>
-        </p:txBody>
-      </p:sp>
-      <p:sp>
-        <p:nvSpPr>
-          <p:cNvPr id="16" name="Text 14"/>
-          <p:cNvSpPr/>
-          <p:nvPr/>
-        </p:nvSpPr>
-        <p:spPr>
-          <a:xfrm>
-            <a:off x="1005840" y="4297680"/>
-            <a:ext cx="10058400" cy="320040"/>
-          </a:xfrm>
-          <a:prstGeom prst="rect">
-            <a:avLst/>
-          </a:prstGeom>
-          <a:noFill/>
-          <a:ln/>
-        </p:spPr>
-        <p:txBody>
-          <a:bodyPr wrap="square" rtlCol="0" anchor="ctr"/>
-          <a:lstStyle/>
-          <a:p>
-            <a:pPr indent="0" marL="0">
-              <a:lnSpc>
-                <a:spcPct val="110000"/>
-              </a:lnSpc>
-              <a:buNone/>
-            </a:pPr>
-            <a:r>
-              <a:rPr lang="en-US" sz="1100" dirty="0">
-                <a:solidFill>
-                  <a:srgbClr val="94A3B8"/>
-                </a:solidFill>
-                <a:latin typeface="Arial" pitchFamily="34" charset="0"/>
-                <a:ea typeface="Arial" pitchFamily="34" charset="-122"/>
-                <a:cs typeface="Arial" pitchFamily="34" charset="-120"/>
-              </a:rPr>
-              <a:t>Founders from underrepresented communities have the capability but not the access. The rooms where decisions happen remain closed.</a:t>
-            </a:r>
-            <a:endParaRPr lang="en-US" sz="1100" dirty="0"/>
+              <a:t>MIT Sloan defines workforce ecosystems as the future of work. 87% of executives say they need one. Almost none have built one. We did.</a:t>
+            </a:r>
+            <a:endParaRPr lang="en-US" sz="1050" dirty="0"/>
           </a:p>
         </p:txBody>
       </p:sp>
@@ -2253,7 +2636,46 @@
         </p:nvSpPr>
         <p:spPr>
           <a:xfrm>
-            <a:off x="731520" y="365760"/>
+            <a:off x="731520" y="320040"/>
+            <a:ext cx="10058400" cy="365760"/>
+          </a:xfrm>
+          <a:prstGeom prst="rect">
+            <a:avLst/>
+          </a:prstGeom>
+          <a:noFill/>
+          <a:ln/>
+        </p:spPr>
+        <p:txBody>
+          <a:bodyPr wrap="square" rtlCol="0" anchor="ctr"/>
+          <a:lstStyle/>
+          <a:p>
+            <a:pPr indent="0" marL="0">
+              <a:buNone/>
+            </a:pPr>
+            <a:r>
+              <a:rPr lang="en-US" sz="1300" b="1" dirty="0">
+                <a:solidFill>
+                  <a:srgbClr val="10B981"/>
+                </a:solidFill>
+                <a:latin typeface="Arial" pitchFamily="34" charset="0"/>
+                <a:ea typeface="Arial" pitchFamily="34" charset="-122"/>
+                <a:cs typeface="Arial" pitchFamily="34" charset="-120"/>
+              </a:rPr>
+              <a:t>WHAT WE BUILT</a:t>
+            </a:r>
+            <a:endParaRPr lang="en-US" sz="1300" dirty="0"/>
+          </a:p>
+        </p:txBody>
+      </p:sp>
+      <p:sp>
+        <p:nvSpPr>
+          <p:cNvPr id="4" name="Text 2"/>
+          <p:cNvSpPr/>
+          <p:nvPr/>
+        </p:nvSpPr>
+        <p:spPr>
+          <a:xfrm>
+            <a:off x="731520" y="731520"/>
             <a:ext cx="10058400" cy="457200"/>
           </a:xfrm>
           <a:prstGeom prst="rect">
@@ -2270,46 +2692,7 @@
               <a:buNone/>
             </a:pPr>
             <a:r>
-              <a:rPr lang="en-US" sz="1400" b="1" dirty="0">
-                <a:solidFill>
-                  <a:srgbClr val="10B981"/>
-                </a:solidFill>
-                <a:latin typeface="Arial" pitchFamily="34" charset="0"/>
-                <a:ea typeface="Arial" pitchFamily="34" charset="-122"/>
-                <a:cs typeface="Arial" pitchFamily="34" charset="-120"/>
-              </a:rPr>
-              <a:t>WHAT WE BUILT</a:t>
-            </a:r>
-            <a:endParaRPr lang="en-US" sz="1400" dirty="0"/>
-          </a:p>
-        </p:txBody>
-      </p:sp>
-      <p:sp>
-        <p:nvSpPr>
-          <p:cNvPr id="4" name="Text 2"/>
-          <p:cNvSpPr/>
-          <p:nvPr/>
-        </p:nvSpPr>
-        <p:spPr>
-          <a:xfrm>
-            <a:off x="731520" y="822960"/>
-            <a:ext cx="10058400" cy="548640"/>
-          </a:xfrm>
-          <a:prstGeom prst="rect">
-            <a:avLst/>
-          </a:prstGeom>
-          <a:noFill/>
-          <a:ln/>
-        </p:spPr>
-        <p:txBody>
-          <a:bodyPr wrap="square" rtlCol="0" anchor="ctr"/>
-          <a:lstStyle/>
-          <a:p>
-            <a:pPr indent="0" marL="0">
-              <a:buNone/>
-            </a:pPr>
-            <a:r>
-              <a:rPr lang="en-US" sz="2200" b="1" dirty="0">
+              <a:rPr lang="en-US" sz="2000" b="1" dirty="0">
                 <a:solidFill>
                   <a:srgbClr val="FFFFFF"/>
                 </a:solidFill>
@@ -2317,9 +2700,9 @@
                 <a:ea typeface="Arial" pitchFamily="34" charset="-122"/>
                 <a:cs typeface="Arial" pitchFamily="34" charset="-120"/>
               </a:rPr>
-              <a:t>23 Interdependent Platforms — One Adaptive Operating System</a:t>
-            </a:r>
-            <a:endParaRPr lang="en-US" sz="2200" dirty="0"/>
+              <a:t>23 Platforms. Three Flagships. One Coordinated Operating System.</a:t>
+            </a:r>
+            <a:endParaRPr lang="en-US" sz="2000" dirty="0"/>
           </a:p>
         </p:txBody>
       </p:sp>
@@ -2331,18 +2714,18 @@
         </p:nvSpPr>
         <p:spPr>
           <a:xfrm>
-            <a:off x="731520" y="1554480"/>
-            <a:ext cx="5303520" cy="658368"/>
+            <a:off x="457200" y="1371600"/>
+            <a:ext cx="3474720" cy="1554480"/>
           </a:xfrm>
           <a:prstGeom prst="roundRect">
             <a:avLst>
-              <a:gd name="adj" fmla="val 6944"/>
+              <a:gd name="adj" fmla="val 3529"/>
             </a:avLst>
           </a:prstGeom>
           <a:solidFill>
             <a:srgbClr val="1A2332"/>
           </a:solidFill>
-          <a:ln w="10160">
+          <a:ln w="15240">
             <a:solidFill>
               <a:srgbClr val="2D7FF9"/>
             </a:solidFill>
@@ -2358,24 +2741,24 @@
         </p:nvSpPr>
         <p:spPr>
           <a:xfrm>
-            <a:off x="914400" y="1600200"/>
-            <a:ext cx="4937760" cy="274320"/>
-          </a:xfrm>
-          <a:prstGeom prst="rect">
-            <a:avLst/>
-          </a:prstGeom>
-          <a:noFill/>
-          <a:ln/>
-        </p:spPr>
-        <p:txBody>
-          <a:bodyPr wrap="square" rtlCol="0" anchor="ctr"/>
-          <a:lstStyle/>
-          <a:p>
-            <a:pPr indent="0" marL="0">
-              <a:buNone/>
-            </a:pPr>
-            <a:r>
-              <a:rPr lang="en-US" sz="1000" b="1" dirty="0">
+            <a:off x="640080" y="1463040"/>
+            <a:ext cx="3108960" cy="228600"/>
+          </a:xfrm>
+          <a:prstGeom prst="rect">
+            <a:avLst/>
+          </a:prstGeom>
+          <a:noFill/>
+          <a:ln/>
+        </p:spPr>
+        <p:txBody>
+          <a:bodyPr wrap="square" rtlCol="0" anchor="ctr"/>
+          <a:lstStyle/>
+          <a:p>
+            <a:pPr indent="0" marL="0">
+              <a:buNone/>
+            </a:pPr>
+            <a:r>
+              <a:rPr lang="en-US" sz="900" b="1" dirty="0">
                 <a:solidFill>
                   <a:srgbClr val="2D7FF9"/>
                 </a:solidFill>
@@ -2383,9 +2766,9 @@
                 <a:ea typeface="Arial" pitchFamily="34" charset="-122"/>
                 <a:cs typeface="Arial" pitchFamily="34" charset="-120"/>
               </a:rPr>
-              <a:t>WORKFORCE</a:t>
-            </a:r>
-            <a:endParaRPr lang="en-US" sz="1000" dirty="0"/>
+              <a:t>WORKFORCE &amp; TRAINING HUB</a:t>
+            </a:r>
+            <a:endParaRPr lang="en-US" sz="900" dirty="0"/>
           </a:p>
         </p:txBody>
       </p:sp>
@@ -2397,20 +2780,62 @@
         </p:nvSpPr>
         <p:spPr>
           <a:xfrm>
-            <a:off x="914400" y="1856232"/>
-            <a:ext cx="4937760" cy="274320"/>
-          </a:xfrm>
-          <a:prstGeom prst="rect">
-            <a:avLst/>
-          </a:prstGeom>
-          <a:noFill/>
-          <a:ln/>
-        </p:spPr>
-        <p:txBody>
-          <a:bodyPr wrap="square" rtlCol="0" anchor="ctr"/>
-          <a:lstStyle/>
-          <a:p>
-            <a:pPr indent="0" marL="0">
+            <a:off x="640080" y="1691640"/>
+            <a:ext cx="3108960" cy="320040"/>
+          </a:xfrm>
+          <a:prstGeom prst="rect">
+            <a:avLst/>
+          </a:prstGeom>
+          <a:noFill/>
+          <a:ln/>
+        </p:spPr>
+        <p:txBody>
+          <a:bodyPr wrap="square" rtlCol="0" anchor="ctr"/>
+          <a:lstStyle/>
+          <a:p>
+            <a:pPr indent="0" marL="0">
+              <a:buNone/>
+            </a:pPr>
+            <a:r>
+              <a:rPr lang="en-US" sz="1500" b="1" dirty="0">
+                <a:solidFill>
+                  <a:srgbClr val="FFFFFF"/>
+                </a:solidFill>
+                <a:latin typeface="Arial" pitchFamily="34" charset="0"/>
+                <a:ea typeface="Arial" pitchFamily="34" charset="-122"/>
+                <a:cs typeface="Arial" pitchFamily="34" charset="-120"/>
+              </a:rPr>
+              <a:t>ThriveUp Academy</a:t>
+            </a:r>
+            <a:endParaRPr lang="en-US" sz="1500" dirty="0"/>
+          </a:p>
+        </p:txBody>
+      </p:sp>
+      <p:sp>
+        <p:nvSpPr>
+          <p:cNvPr id="8" name="Text 6"/>
+          <p:cNvSpPr/>
+          <p:nvPr/>
+        </p:nvSpPr>
+        <p:spPr>
+          <a:xfrm>
+            <a:off x="640080" y="2057400"/>
+            <a:ext cx="3108960" cy="731520"/>
+          </a:xfrm>
+          <a:prstGeom prst="rect">
+            <a:avLst/>
+          </a:prstGeom>
+          <a:noFill/>
+          <a:ln/>
+        </p:spPr>
+        <p:txBody>
+          <a:bodyPr wrap="square" rtlCol="0" anchor="ctr"/>
+          <a:lstStyle/>
+          <a:p>
+            <a:pPr indent="0" marL="0">
+              <a:lnSpc>
+                <a:spcPct val="120000"/>
+              </a:lnSpc>
               <a:buNone/>
             </a:pPr>
             <a:r>
@@ -2422,7 +2847,7 @@
                 <a:ea typeface="Arial" pitchFamily="34" charset="-122"/>
                 <a:cs typeface="Arial" pitchFamily="34" charset="-120"/>
               </a:rPr>
-              <a:t>ThriveUp Academy, Manager in Training, ISSS</a:t>
+              <a:t>Training pipelines, skill alignment, grant readiness, program design. The coordination brain for all 23 platforms.</a:t>
             </a:r>
             <a:endParaRPr lang="en-US" sz="950" dirty="0"/>
           </a:p>
@@ -2430,24 +2855,318 @@
       </p:sp>
       <p:sp>
         <p:nvSpPr>
-          <p:cNvPr id="8" name="Shape 6"/>
-          <p:cNvSpPr/>
-          <p:nvPr/>
-        </p:nvSpPr>
-        <p:spPr>
-          <a:xfrm>
-            <a:off x="731520" y="2331720"/>
-            <a:ext cx="5303520" cy="658368"/>
+          <p:cNvPr id="9" name="Shape 7"/>
+          <p:cNvSpPr/>
+          <p:nvPr/>
+        </p:nvSpPr>
+        <p:spPr>
+          <a:xfrm>
+            <a:off x="4206240" y="1371600"/>
+            <a:ext cx="3474720" cy="1554480"/>
           </a:xfrm>
           <a:prstGeom prst="roundRect">
             <a:avLst>
-              <a:gd name="adj" fmla="val 6944"/>
+              <a:gd name="adj" fmla="val 3529"/>
             </a:avLst>
           </a:prstGeom>
           <a:solidFill>
             <a:srgbClr val="1A2332"/>
           </a:solidFill>
-          <a:ln w="10160">
+          <a:ln w="15240">
+            <a:solidFill>
+              <a:srgbClr val="10B981"/>
+            </a:solidFill>
+            <a:prstDash val="solid"/>
+          </a:ln>
+        </p:spPr>
+      </p:sp>
+      <p:sp>
+        <p:nvSpPr>
+          <p:cNvPr id="10" name="Text 8"/>
+          <p:cNvSpPr/>
+          <p:nvPr/>
+        </p:nvSpPr>
+        <p:spPr>
+          <a:xfrm>
+            <a:off x="4389120" y="1463040"/>
+            <a:ext cx="3108960" cy="228600"/>
+          </a:xfrm>
+          <a:prstGeom prst="rect">
+            <a:avLst/>
+          </a:prstGeom>
+          <a:noFill/>
+          <a:ln/>
+        </p:spPr>
+        <p:txBody>
+          <a:bodyPr wrap="square" rtlCol="0" anchor="ctr"/>
+          <a:lstStyle/>
+          <a:p>
+            <a:pPr indent="0" marL="0">
+              <a:buNone/>
+            </a:pPr>
+            <a:r>
+              <a:rPr lang="en-US" sz="900" b="1" dirty="0">
+                <a:solidFill>
+                  <a:srgbClr val="10B981"/>
+                </a:solidFill>
+                <a:latin typeface="Arial" pitchFamily="34" charset="0"/>
+                <a:ea typeface="Arial" pitchFamily="34" charset="-122"/>
+                <a:cs typeface="Arial" pitchFamily="34" charset="-120"/>
+              </a:rPr>
+              <a:t>SAFETY &amp; EMERGENCY</a:t>
+            </a:r>
+            <a:endParaRPr lang="en-US" sz="900" dirty="0"/>
+          </a:p>
+        </p:txBody>
+      </p:sp>
+      <p:sp>
+        <p:nvSpPr>
+          <p:cNvPr id="11" name="Text 9"/>
+          <p:cNvSpPr/>
+          <p:nvPr/>
+        </p:nvSpPr>
+        <p:spPr>
+          <a:xfrm>
+            <a:off x="4389120" y="1691640"/>
+            <a:ext cx="3108960" cy="320040"/>
+          </a:xfrm>
+          <a:prstGeom prst="rect">
+            <a:avLst/>
+          </a:prstGeom>
+          <a:noFill/>
+          <a:ln/>
+        </p:spPr>
+        <p:txBody>
+          <a:bodyPr wrap="square" rtlCol="0" anchor="ctr"/>
+          <a:lstStyle/>
+          <a:p>
+            <a:pPr indent="0" marL="0">
+              <a:buNone/>
+            </a:pPr>
+            <a:r>
+              <a:rPr lang="en-US" sz="1500" b="1" dirty="0">
+                <a:solidFill>
+                  <a:srgbClr val="FFFFFF"/>
+                </a:solidFill>
+                <a:latin typeface="Arial" pitchFamily="34" charset="0"/>
+                <a:ea typeface="Arial" pitchFamily="34" charset="-122"/>
+                <a:cs typeface="Arial" pitchFamily="34" charset="-120"/>
+              </a:rPr>
+              <a:t>Shield Atlas</a:t>
+            </a:r>
+            <a:endParaRPr lang="en-US" sz="1500" dirty="0"/>
+          </a:p>
+        </p:txBody>
+      </p:sp>
+      <p:sp>
+        <p:nvSpPr>
+          <p:cNvPr id="12" name="Text 10"/>
+          <p:cNvSpPr/>
+          <p:nvPr/>
+        </p:nvSpPr>
+        <p:spPr>
+          <a:xfrm>
+            <a:off x="4389120" y="2057400"/>
+            <a:ext cx="3108960" cy="731520"/>
+          </a:xfrm>
+          <a:prstGeom prst="rect">
+            <a:avLst/>
+          </a:prstGeom>
+          <a:noFill/>
+          <a:ln/>
+        </p:spPr>
+        <p:txBody>
+          <a:bodyPr wrap="square" rtlCol="0" anchor="ctr"/>
+          <a:lstStyle/>
+          <a:p>
+            <a:pPr indent="0" marL="0">
+              <a:lnSpc>
+                <a:spcPct val="120000"/>
+              </a:lnSpc>
+              <a:buNone/>
+            </a:pPr>
+            <a:r>
+              <a:rPr lang="en-US" sz="950" dirty="0">
+                <a:solidFill>
+                  <a:srgbClr val="94A3B8"/>
+                </a:solidFill>
+                <a:latin typeface="Arial" pitchFamily="34" charset="0"/>
+                <a:ea typeface="Arial" pitchFamily="34" charset="-122"/>
+                <a:cs typeface="Arial" pitchFamily="34" charset="-120"/>
+              </a:rPr>
+              <a:t>Emergency response, risk detection, crisis coordination, continuity planning. Geographic risk mapping across all hazard types.</a:t>
+            </a:r>
+            <a:endParaRPr lang="en-US" sz="950" dirty="0"/>
+          </a:p>
+        </p:txBody>
+      </p:sp>
+      <p:sp>
+        <p:nvSpPr>
+          <p:cNvPr id="13" name="Shape 11"/>
+          <p:cNvSpPr/>
+          <p:nvPr/>
+        </p:nvSpPr>
+        <p:spPr>
+          <a:xfrm>
+            <a:off x="7955280" y="1371600"/>
+            <a:ext cx="3474720" cy="1554480"/>
+          </a:xfrm>
+          <a:prstGeom prst="roundRect">
+            <a:avLst>
+              <a:gd name="adj" fmla="val 3529"/>
+            </a:avLst>
+          </a:prstGeom>
+          <a:solidFill>
+            <a:srgbClr val="1A2332"/>
+          </a:solidFill>
+          <a:ln w="15240">
+            <a:solidFill>
+              <a:srgbClr val="F59E0B"/>
+            </a:solidFill>
+            <a:prstDash val="solid"/>
+          </a:ln>
+        </p:spPr>
+      </p:sp>
+      <p:sp>
+        <p:nvSpPr>
+          <p:cNvPr id="14" name="Text 12"/>
+          <p:cNvSpPr/>
+          <p:nvPr/>
+        </p:nvSpPr>
+        <p:spPr>
+          <a:xfrm>
+            <a:off x="8138160" y="1463040"/>
+            <a:ext cx="3108960" cy="228600"/>
+          </a:xfrm>
+          <a:prstGeom prst="rect">
+            <a:avLst/>
+          </a:prstGeom>
+          <a:noFill/>
+          <a:ln/>
+        </p:spPr>
+        <p:txBody>
+          <a:bodyPr wrap="square" rtlCol="0" anchor="ctr"/>
+          <a:lstStyle/>
+          <a:p>
+            <a:pPr indent="0" marL="0">
+              <a:buNone/>
+            </a:pPr>
+            <a:r>
+              <a:rPr lang="en-US" sz="900" b="1" dirty="0">
+                <a:solidFill>
+                  <a:srgbClr val="F59E0B"/>
+                </a:solidFill>
+                <a:latin typeface="Arial" pitchFamily="34" charset="0"/>
+                <a:ea typeface="Arial" pitchFamily="34" charset="-122"/>
+                <a:cs typeface="Arial" pitchFamily="34" charset="-120"/>
+              </a:rPr>
+              <a:t>COLLABORATION PARTNER</a:t>
+            </a:r>
+            <a:endParaRPr lang="en-US" sz="900" dirty="0"/>
+          </a:p>
+        </p:txBody>
+      </p:sp>
+      <p:sp>
+        <p:nvSpPr>
+          <p:cNvPr id="15" name="Text 13"/>
+          <p:cNvSpPr/>
+          <p:nvPr/>
+        </p:nvSpPr>
+        <p:spPr>
+          <a:xfrm>
+            <a:off x="8138160" y="1691640"/>
+            <a:ext cx="3108960" cy="320040"/>
+          </a:xfrm>
+          <a:prstGeom prst="rect">
+            <a:avLst/>
+          </a:prstGeom>
+          <a:noFill/>
+          <a:ln/>
+        </p:spPr>
+        <p:txBody>
+          <a:bodyPr wrap="square" rtlCol="0" anchor="ctr"/>
+          <a:lstStyle/>
+          <a:p>
+            <a:pPr indent="0" marL="0">
+              <a:buNone/>
+            </a:pPr>
+            <a:r>
+              <a:rPr lang="en-US" sz="1500" b="1" dirty="0">
+                <a:solidFill>
+                  <a:srgbClr val="FFFFFF"/>
+                </a:solidFill>
+                <a:latin typeface="Arial" pitchFamily="34" charset="0"/>
+                <a:ea typeface="Arial" pitchFamily="34" charset="-122"/>
+                <a:cs typeface="Arial" pitchFamily="34" charset="-120"/>
+              </a:rPr>
+              <a:t>AGOS Core</a:t>
+            </a:r>
+            <a:endParaRPr lang="en-US" sz="1500" dirty="0"/>
+          </a:p>
+        </p:txBody>
+      </p:sp>
+      <p:sp>
+        <p:nvSpPr>
+          <p:cNvPr id="16" name="Text 14"/>
+          <p:cNvSpPr/>
+          <p:nvPr/>
+        </p:nvSpPr>
+        <p:spPr>
+          <a:xfrm>
+            <a:off x="8138160" y="2057400"/>
+            <a:ext cx="3108960" cy="731520"/>
+          </a:xfrm>
+          <a:prstGeom prst="rect">
+            <a:avLst/>
+          </a:prstGeom>
+          <a:noFill/>
+          <a:ln/>
+        </p:spPr>
+        <p:txBody>
+          <a:bodyPr wrap="square" rtlCol="0" anchor="ctr"/>
+          <a:lstStyle/>
+          <a:p>
+            <a:pPr indent="0" marL="0">
+              <a:lnSpc>
+                <a:spcPct val="120000"/>
+              </a:lnSpc>
+              <a:buNone/>
+            </a:pPr>
+            <a:r>
+              <a:rPr lang="en-US" sz="950" dirty="0">
+                <a:solidFill>
+                  <a:srgbClr val="94A3B8"/>
+                </a:solidFill>
+                <a:latin typeface="Arial" pitchFamily="34" charset="0"/>
+                <a:ea typeface="Arial" pitchFamily="34" charset="-122"/>
+                <a:cs typeface="Arial" pitchFamily="34" charset="-120"/>
+              </a:rPr>
+              <a:t>Sovereign partner ecosystem. Bilateral exchange every 8 hours. 5 improvements adopted into our system. Proof the model works.</a:t>
+            </a:r>
+            <a:endParaRPr lang="en-US" sz="950" dirty="0"/>
+          </a:p>
+        </p:txBody>
+      </p:sp>
+      <p:sp>
+        <p:nvSpPr>
+          <p:cNvPr id="17" name="Shape 15"/>
+          <p:cNvSpPr/>
+          <p:nvPr/>
+        </p:nvSpPr>
+        <p:spPr>
+          <a:xfrm>
+            <a:off x="457200" y="3246120"/>
+            <a:ext cx="3566160" cy="594360"/>
+          </a:xfrm>
+          <a:prstGeom prst="roundRect">
+            <a:avLst>
+              <a:gd name="adj" fmla="val 6154"/>
+            </a:avLst>
+          </a:prstGeom>
+          <a:solidFill>
+            <a:srgbClr val="141B24"/>
+          </a:solidFill>
+          <a:ln w="6350">
             <a:solidFill>
               <a:srgbClr val="2D7FF9"/>
             </a:solidFill>
@@ -2457,30 +3176,30 @@
       </p:sp>
       <p:sp>
         <p:nvSpPr>
-          <p:cNvPr id="9" name="Text 7"/>
-          <p:cNvSpPr/>
-          <p:nvPr/>
-        </p:nvSpPr>
-        <p:spPr>
-          <a:xfrm>
-            <a:off x="914400" y="2377440"/>
-            <a:ext cx="4937760" cy="274320"/>
-          </a:xfrm>
-          <a:prstGeom prst="rect">
-            <a:avLst/>
-          </a:prstGeom>
-          <a:noFill/>
-          <a:ln/>
-        </p:spPr>
-        <p:txBody>
-          <a:bodyPr wrap="square" rtlCol="0" anchor="ctr"/>
-          <a:lstStyle/>
-          <a:p>
-            <a:pPr indent="0" marL="0">
-              <a:buNone/>
-            </a:pPr>
-            <a:r>
-              <a:rPr lang="en-US" sz="1000" b="1" dirty="0">
+          <p:cNvPr id="18" name="Text 16"/>
+          <p:cNvSpPr/>
+          <p:nvPr/>
+        </p:nvSpPr>
+        <p:spPr>
+          <a:xfrm>
+            <a:off x="594360" y="3273552"/>
+            <a:ext cx="3291840" cy="201168"/>
+          </a:xfrm>
+          <a:prstGeom prst="rect">
+            <a:avLst/>
+          </a:prstGeom>
+          <a:noFill/>
+          <a:ln/>
+        </p:spPr>
+        <p:txBody>
+          <a:bodyPr wrap="square" rtlCol="0" anchor="ctr"/>
+          <a:lstStyle/>
+          <a:p>
+            <a:pPr indent="0" marL="0">
+              <a:buNone/>
+            </a:pPr>
+            <a:r>
+              <a:rPr lang="en-US" sz="900" b="1" dirty="0">
                 <a:solidFill>
                   <a:srgbClr val="2D7FF9"/>
                 </a:solidFill>
@@ -2488,38 +3207,38 @@
                 <a:ea typeface="Arial" pitchFamily="34" charset="-122"/>
                 <a:cs typeface="Arial" pitchFamily="34" charset="-120"/>
               </a:rPr>
-              <a:t>VETERAN SERVICES</a:t>
-            </a:r>
-            <a:endParaRPr lang="en-US" sz="1000" dirty="0"/>
-          </a:p>
-        </p:txBody>
-      </p:sp>
-      <p:sp>
-        <p:nvSpPr>
-          <p:cNvPr id="10" name="Text 8"/>
-          <p:cNvSpPr/>
-          <p:nvPr/>
-        </p:nvSpPr>
-        <p:spPr>
-          <a:xfrm>
-            <a:off x="914400" y="2633472"/>
-            <a:ext cx="4937760" cy="274320"/>
-          </a:xfrm>
-          <a:prstGeom prst="rect">
-            <a:avLst/>
-          </a:prstGeom>
-          <a:noFill/>
-          <a:ln/>
-        </p:spPr>
-        <p:txBody>
-          <a:bodyPr wrap="square" rtlCol="0" anchor="ctr"/>
-          <a:lstStyle/>
-          <a:p>
-            <a:pPr indent="0" marL="0">
-              <a:buNone/>
-            </a:pPr>
-            <a:r>
-              <a:rPr lang="en-US" sz="950" dirty="0">
+              <a:t>Veteran Services</a:t>
+            </a:r>
+            <a:endParaRPr lang="en-US" sz="900" dirty="0"/>
+          </a:p>
+        </p:txBody>
+      </p:sp>
+      <p:sp>
+        <p:nvSpPr>
+          <p:cNvPr id="19" name="Text 17"/>
+          <p:cNvSpPr/>
+          <p:nvPr/>
+        </p:nvSpPr>
+        <p:spPr>
+          <a:xfrm>
+            <a:off x="594360" y="3502152"/>
+            <a:ext cx="3291840" cy="274320"/>
+          </a:xfrm>
+          <a:prstGeom prst="rect">
+            <a:avLst/>
+          </a:prstGeom>
+          <a:noFill/>
+          <a:ln/>
+        </p:spPr>
+        <p:txBody>
+          <a:bodyPr wrap="square" rtlCol="0" anchor="ctr"/>
+          <a:lstStyle/>
+          <a:p>
+            <a:pPr indent="0" marL="0">
+              <a:buNone/>
+            </a:pPr>
+            <a:r>
+              <a:rPr lang="en-US" sz="850" dirty="0">
                 <a:solidFill>
                   <a:srgbClr val="94A3B8"/>
                 </a:solidFill>
@@ -2527,32 +3246,32 @@
                 <a:ea typeface="Arial" pitchFamily="34" charset="-122"/>
                 <a:cs typeface="Arial" pitchFamily="34" charset="-120"/>
               </a:rPr>
-              <a:t>M2C (Military-to-Civilian), Collaborative Advocate</a:t>
-            </a:r>
-            <a:endParaRPr lang="en-US" sz="950" dirty="0"/>
-          </a:p>
-        </p:txBody>
-      </p:sp>
-      <p:sp>
-        <p:nvSpPr>
-          <p:cNvPr id="11" name="Shape 9"/>
-          <p:cNvSpPr/>
-          <p:nvPr/>
-        </p:nvSpPr>
-        <p:spPr>
-          <a:xfrm>
-            <a:off x="731520" y="3108960"/>
-            <a:ext cx="5303520" cy="658368"/>
+              <a:t>M2C, Collaborative Advocate</a:t>
+            </a:r>
+            <a:endParaRPr lang="en-US" sz="850" dirty="0"/>
+          </a:p>
+        </p:txBody>
+      </p:sp>
+      <p:sp>
+        <p:nvSpPr>
+          <p:cNvPr id="20" name="Shape 18"/>
+          <p:cNvSpPr/>
+          <p:nvPr/>
+        </p:nvSpPr>
+        <p:spPr>
+          <a:xfrm>
+            <a:off x="4251960" y="3246120"/>
+            <a:ext cx="3566160" cy="594360"/>
           </a:xfrm>
           <a:prstGeom prst="roundRect">
             <a:avLst>
-              <a:gd name="adj" fmla="val 6944"/>
+              <a:gd name="adj" fmla="val 6154"/>
             </a:avLst>
           </a:prstGeom>
           <a:solidFill>
-            <a:srgbClr val="1A2332"/>
+            <a:srgbClr val="141B24"/>
           </a:solidFill>
-          <a:ln w="10160">
+          <a:ln w="6350">
             <a:solidFill>
               <a:srgbClr val="10B981"/>
             </a:solidFill>
@@ -2562,30 +3281,30 @@
       </p:sp>
       <p:sp>
         <p:nvSpPr>
-          <p:cNvPr id="12" name="Text 10"/>
-          <p:cNvSpPr/>
-          <p:nvPr/>
-        </p:nvSpPr>
-        <p:spPr>
-          <a:xfrm>
-            <a:off x="914400" y="3154680"/>
-            <a:ext cx="4937760" cy="274320"/>
-          </a:xfrm>
-          <a:prstGeom prst="rect">
-            <a:avLst/>
-          </a:prstGeom>
-          <a:noFill/>
-          <a:ln/>
-        </p:spPr>
-        <p:txBody>
-          <a:bodyPr wrap="square" rtlCol="0" anchor="ctr"/>
-          <a:lstStyle/>
-          <a:p>
-            <a:pPr indent="0" marL="0">
-              <a:buNone/>
-            </a:pPr>
-            <a:r>
-              <a:rPr lang="en-US" sz="1000" b="1" dirty="0">
+          <p:cNvPr id="21" name="Text 19"/>
+          <p:cNvSpPr/>
+          <p:nvPr/>
+        </p:nvSpPr>
+        <p:spPr>
+          <a:xfrm>
+            <a:off x="4389120" y="3273552"/>
+            <a:ext cx="3291840" cy="201168"/>
+          </a:xfrm>
+          <a:prstGeom prst="rect">
+            <a:avLst/>
+          </a:prstGeom>
+          <a:noFill/>
+          <a:ln/>
+        </p:spPr>
+        <p:txBody>
+          <a:bodyPr wrap="square" rtlCol="0" anchor="ctr"/>
+          <a:lstStyle/>
+          <a:p>
+            <a:pPr indent="0" marL="0">
+              <a:buNone/>
+            </a:pPr>
+            <a:r>
+              <a:rPr lang="en-US" sz="900" b="1" dirty="0">
                 <a:solidFill>
                   <a:srgbClr val="10B981"/>
                 </a:solidFill>
@@ -2593,38 +3312,38 @@
                 <a:ea typeface="Arial" pitchFamily="34" charset="-122"/>
                 <a:cs typeface="Arial" pitchFamily="34" charset="-120"/>
               </a:rPr>
-              <a:t>HEALTH EQUITY</a:t>
-            </a:r>
-            <a:endParaRPr lang="en-US" sz="1000" dirty="0"/>
-          </a:p>
-        </p:txBody>
-      </p:sp>
-      <p:sp>
-        <p:nvSpPr>
-          <p:cNvPr id="13" name="Text 11"/>
-          <p:cNvSpPr/>
-          <p:nvPr/>
-        </p:nvSpPr>
-        <p:spPr>
-          <a:xfrm>
-            <a:off x="914400" y="3410712"/>
-            <a:ext cx="4937760" cy="274320"/>
-          </a:xfrm>
-          <a:prstGeom prst="rect">
-            <a:avLst/>
-          </a:prstGeom>
-          <a:noFill/>
-          <a:ln/>
-        </p:spPr>
-        <p:txBody>
-          <a:bodyPr wrap="square" rtlCol="0" anchor="ctr"/>
-          <a:lstStyle/>
-          <a:p>
-            <a:pPr indent="0" marL="0">
-              <a:buNone/>
-            </a:pPr>
-            <a:r>
-              <a:rPr lang="en-US" sz="950" dirty="0">
+              <a:t>Health Equity</a:t>
+            </a:r>
+            <a:endParaRPr lang="en-US" sz="900" dirty="0"/>
+          </a:p>
+        </p:txBody>
+      </p:sp>
+      <p:sp>
+        <p:nvSpPr>
+          <p:cNvPr id="22" name="Text 20"/>
+          <p:cNvSpPr/>
+          <p:nvPr/>
+        </p:nvSpPr>
+        <p:spPr>
+          <a:xfrm>
+            <a:off x="4389120" y="3502152"/>
+            <a:ext cx="3291840" cy="274320"/>
+          </a:xfrm>
+          <a:prstGeom prst="rect">
+            <a:avLst/>
+          </a:prstGeom>
+          <a:noFill/>
+          <a:ln/>
+        </p:spPr>
+        <p:txBody>
+          <a:bodyPr wrap="square" rtlCol="0" anchor="ctr"/>
+          <a:lstStyle/>
+          <a:p>
+            <a:pPr indent="0" marL="0">
+              <a:buNone/>
+            </a:pPr>
+            <a:r>
+              <a:rPr lang="en-US" sz="850" dirty="0">
                 <a:solidFill>
                   <a:srgbClr val="94A3B8"/>
                 </a:solidFill>
@@ -2634,30 +3353,135 @@
               </a:rPr>
               <a:t>Whole-Person Health, Sankofa, PillScheduler, SafeCogniCare</a:t>
             </a:r>
-            <a:endParaRPr lang="en-US" sz="950" dirty="0"/>
-          </a:p>
-        </p:txBody>
-      </p:sp>
-      <p:sp>
-        <p:nvSpPr>
-          <p:cNvPr id="14" name="Shape 12"/>
-          <p:cNvSpPr/>
-          <p:nvPr/>
-        </p:nvSpPr>
-        <p:spPr>
-          <a:xfrm>
-            <a:off x="731520" y="3886200"/>
-            <a:ext cx="5303520" cy="658368"/>
+            <a:endParaRPr lang="en-US" sz="850" dirty="0"/>
+          </a:p>
+        </p:txBody>
+      </p:sp>
+      <p:sp>
+        <p:nvSpPr>
+          <p:cNvPr id="23" name="Shape 21"/>
+          <p:cNvSpPr/>
+          <p:nvPr/>
+        </p:nvSpPr>
+        <p:spPr>
+          <a:xfrm>
+            <a:off x="8046720" y="3246120"/>
+            <a:ext cx="3566160" cy="594360"/>
           </a:xfrm>
           <a:prstGeom prst="roundRect">
             <a:avLst>
-              <a:gd name="adj" fmla="val 6944"/>
+              <a:gd name="adj" fmla="val 6154"/>
             </a:avLst>
           </a:prstGeom>
           <a:solidFill>
-            <a:srgbClr val="1A2332"/>
+            <a:srgbClr val="141B24"/>
           </a:solidFill>
-          <a:ln w="10160">
+          <a:ln w="6350">
+            <a:solidFill>
+              <a:srgbClr val="2D7FF9"/>
+            </a:solidFill>
+            <a:prstDash val="solid"/>
+          </a:ln>
+        </p:spPr>
+      </p:sp>
+      <p:sp>
+        <p:nvSpPr>
+          <p:cNvPr id="24" name="Text 22"/>
+          <p:cNvSpPr/>
+          <p:nvPr/>
+        </p:nvSpPr>
+        <p:spPr>
+          <a:xfrm>
+            <a:off x="8183880" y="3273552"/>
+            <a:ext cx="3291840" cy="201168"/>
+          </a:xfrm>
+          <a:prstGeom prst="rect">
+            <a:avLst/>
+          </a:prstGeom>
+          <a:noFill/>
+          <a:ln/>
+        </p:spPr>
+        <p:txBody>
+          <a:bodyPr wrap="square" rtlCol="0" anchor="ctr"/>
+          <a:lstStyle/>
+          <a:p>
+            <a:pPr indent="0" marL="0">
+              <a:buNone/>
+            </a:pPr>
+            <a:r>
+              <a:rPr lang="en-US" sz="900" b="1" dirty="0">
+                <a:solidFill>
+                  <a:srgbClr val="2D7FF9"/>
+                </a:solidFill>
+                <a:latin typeface="Arial" pitchFamily="34" charset="0"/>
+                <a:ea typeface="Arial" pitchFamily="34" charset="-122"/>
+                <a:cs typeface="Arial" pitchFamily="34" charset="-120"/>
+              </a:rPr>
+              <a:t>Business</a:t>
+            </a:r>
+            <a:endParaRPr lang="en-US" sz="900" dirty="0"/>
+          </a:p>
+        </p:txBody>
+      </p:sp>
+      <p:sp>
+        <p:nvSpPr>
+          <p:cNvPr id="25" name="Text 23"/>
+          <p:cNvSpPr/>
+          <p:nvPr/>
+        </p:nvSpPr>
+        <p:spPr>
+          <a:xfrm>
+            <a:off x="8183880" y="3502152"/>
+            <a:ext cx="3291840" cy="274320"/>
+          </a:xfrm>
+          <a:prstGeom prst="rect">
+            <a:avLst/>
+          </a:prstGeom>
+          <a:noFill/>
+          <a:ln/>
+        </p:spPr>
+        <p:txBody>
+          <a:bodyPr wrap="square" rtlCol="0" anchor="ctr"/>
+          <a:lstStyle/>
+          <a:p>
+            <a:pPr indent="0" marL="0">
+              <a:buNone/>
+            </a:pPr>
+            <a:r>
+              <a:rPr lang="en-US" sz="850" dirty="0">
+                <a:solidFill>
+                  <a:srgbClr val="94A3B8"/>
+                </a:solidFill>
+                <a:latin typeface="Arial" pitchFamily="34" charset="0"/>
+                <a:ea typeface="Arial" pitchFamily="34" charset="-122"/>
+                <a:cs typeface="Arial" pitchFamily="34" charset="-120"/>
+              </a:rPr>
+              <a:t>MCE (656K+ records), Pinnacle Business</a:t>
+            </a:r>
+            <a:endParaRPr lang="en-US" sz="850" dirty="0"/>
+          </a:p>
+        </p:txBody>
+      </p:sp>
+      <p:sp>
+        <p:nvSpPr>
+          <p:cNvPr id="26" name="Shape 24"/>
+          <p:cNvSpPr/>
+          <p:nvPr/>
+        </p:nvSpPr>
+        <p:spPr>
+          <a:xfrm>
+            <a:off x="457200" y="3977640"/>
+            <a:ext cx="3566160" cy="594360"/>
+          </a:xfrm>
+          <a:prstGeom prst="roundRect">
+            <a:avLst>
+              <a:gd name="adj" fmla="val 6154"/>
+            </a:avLst>
+          </a:prstGeom>
+          <a:solidFill>
+            <a:srgbClr val="141B24"/>
+          </a:solidFill>
+          <a:ln w="6350">
             <a:solidFill>
               <a:srgbClr val="10B981"/>
             </a:solidFill>
@@ -2667,30 +3491,30 @@
       </p:sp>
       <p:sp>
         <p:nvSpPr>
-          <p:cNvPr id="15" name="Text 13"/>
-          <p:cNvSpPr/>
-          <p:nvPr/>
-        </p:nvSpPr>
-        <p:spPr>
-          <a:xfrm>
-            <a:off x="914400" y="3931920"/>
-            <a:ext cx="4937760" cy="274320"/>
-          </a:xfrm>
-          <a:prstGeom prst="rect">
-            <a:avLst/>
-          </a:prstGeom>
-          <a:noFill/>
-          <a:ln/>
-        </p:spPr>
-        <p:txBody>
-          <a:bodyPr wrap="square" rtlCol="0" anchor="ctr"/>
-          <a:lstStyle/>
-          <a:p>
-            <a:pPr indent="0" marL="0">
-              <a:buNone/>
-            </a:pPr>
-            <a:r>
-              <a:rPr lang="en-US" sz="1000" b="1" dirty="0">
+          <p:cNvPr id="27" name="Text 25"/>
+          <p:cNvSpPr/>
+          <p:nvPr/>
+        </p:nvSpPr>
+        <p:spPr>
+          <a:xfrm>
+            <a:off x="594360" y="4005072"/>
+            <a:ext cx="3291840" cy="201168"/>
+          </a:xfrm>
+          <a:prstGeom prst="rect">
+            <a:avLst/>
+          </a:prstGeom>
+          <a:noFill/>
+          <a:ln/>
+        </p:spPr>
+        <p:txBody>
+          <a:bodyPr wrap="square" rtlCol="0" anchor="ctr"/>
+          <a:lstStyle/>
+          <a:p>
+            <a:pPr indent="0" marL="0">
+              <a:buNone/>
+            </a:pPr>
+            <a:r>
+              <a:rPr lang="en-US" sz="900" b="1" dirty="0">
                 <a:solidFill>
                   <a:srgbClr val="10B981"/>
                 </a:solidFill>
@@ -2698,38 +3522,38 @@
                 <a:ea typeface="Arial" pitchFamily="34" charset="-122"/>
                 <a:cs typeface="Arial" pitchFamily="34" charset="-120"/>
               </a:rPr>
-              <a:t>SAFETY &amp; EMERGENCY</a:t>
-            </a:r>
-            <a:endParaRPr lang="en-US" sz="1000" dirty="0"/>
-          </a:p>
-        </p:txBody>
-      </p:sp>
-      <p:sp>
-        <p:nvSpPr>
-          <p:cNvPr id="16" name="Text 14"/>
-          <p:cNvSpPr/>
-          <p:nvPr/>
-        </p:nvSpPr>
-        <p:spPr>
-          <a:xfrm>
-            <a:off x="914400" y="4187952"/>
-            <a:ext cx="4937760" cy="274320"/>
-          </a:xfrm>
-          <a:prstGeom prst="rect">
-            <a:avLst/>
-          </a:prstGeom>
-          <a:noFill/>
-          <a:ln/>
-        </p:spPr>
-        <p:txBody>
-          <a:bodyPr wrap="square" rtlCol="0" anchor="ctr"/>
-          <a:lstStyle/>
-          <a:p>
-            <a:pPr indent="0" marL="0">
-              <a:buNone/>
-            </a:pPr>
-            <a:r>
-              <a:rPr lang="en-US" sz="950" dirty="0">
+              <a:t>Community</a:t>
+            </a:r>
+            <a:endParaRPr lang="en-US" sz="900" dirty="0"/>
+          </a:p>
+        </p:txBody>
+      </p:sp>
+      <p:sp>
+        <p:nvSpPr>
+          <p:cNvPr id="28" name="Text 26"/>
+          <p:cNvSpPr/>
+          <p:nvPr/>
+        </p:nvSpPr>
+        <p:spPr>
+          <a:xfrm>
+            <a:off x="594360" y="4233672"/>
+            <a:ext cx="3291840" cy="274320"/>
+          </a:xfrm>
+          <a:prstGeom prst="rect">
+            <a:avLst/>
+          </a:prstGeom>
+          <a:noFill/>
+          <a:ln/>
+        </p:spPr>
+        <p:txBody>
+          <a:bodyPr wrap="square" rtlCol="0" anchor="ctr"/>
+          <a:lstStyle/>
+          <a:p>
+            <a:pPr indent="0" marL="0">
+              <a:buNone/>
+            </a:pPr>
+            <a:r>
+              <a:rPr lang="en-US" sz="850" dirty="0">
                 <a:solidFill>
                   <a:srgbClr val="94A3B8"/>
                 </a:solidFill>
@@ -2737,32 +3561,32 @@
                 <a:ea typeface="Arial" pitchFamily="34" charset="-122"/>
                 <a:cs typeface="Arial" pitchFamily="34" charset="-120"/>
               </a:rPr>
-              <a:t>Shield Atlas, SafeReport</a:t>
-            </a:r>
-            <a:endParaRPr lang="en-US" sz="950" dirty="0"/>
-          </a:p>
-        </p:txBody>
-      </p:sp>
-      <p:sp>
-        <p:nvSpPr>
-          <p:cNvPr id="17" name="Shape 15"/>
-          <p:cNvSpPr/>
-          <p:nvPr/>
-        </p:nvSpPr>
-        <p:spPr>
-          <a:xfrm>
-            <a:off x="6400800" y="1554480"/>
-            <a:ext cx="5303520" cy="658368"/>
+              <a:t>LifeBridge (Virtual 211), Autoimmune Thrive</a:t>
+            </a:r>
+            <a:endParaRPr lang="en-US" sz="850" dirty="0"/>
+          </a:p>
+        </p:txBody>
+      </p:sp>
+      <p:sp>
+        <p:nvSpPr>
+          <p:cNvPr id="29" name="Shape 27"/>
+          <p:cNvSpPr/>
+          <p:nvPr/>
+        </p:nvSpPr>
+        <p:spPr>
+          <a:xfrm>
+            <a:off x="4251960" y="3977640"/>
+            <a:ext cx="3566160" cy="594360"/>
           </a:xfrm>
           <a:prstGeom prst="roundRect">
             <a:avLst>
-              <a:gd name="adj" fmla="val 6944"/>
+              <a:gd name="adj" fmla="val 6154"/>
             </a:avLst>
           </a:prstGeom>
           <a:solidFill>
-            <a:srgbClr val="1A2332"/>
+            <a:srgbClr val="141B24"/>
           </a:solidFill>
-          <a:ln w="10160">
+          <a:ln w="6350">
             <a:solidFill>
               <a:srgbClr val="2D7FF9"/>
             </a:solidFill>
@@ -2772,30 +3596,30 @@
       </p:sp>
       <p:sp>
         <p:nvSpPr>
-          <p:cNvPr id="18" name="Text 16"/>
-          <p:cNvSpPr/>
-          <p:nvPr/>
-        </p:nvSpPr>
-        <p:spPr>
-          <a:xfrm>
-            <a:off x="6583680" y="1600200"/>
-            <a:ext cx="4937760" cy="274320"/>
-          </a:xfrm>
-          <a:prstGeom prst="rect">
-            <a:avLst/>
-          </a:prstGeom>
-          <a:noFill/>
-          <a:ln/>
-        </p:spPr>
-        <p:txBody>
-          <a:bodyPr wrap="square" rtlCol="0" anchor="ctr"/>
-          <a:lstStyle/>
-          <a:p>
-            <a:pPr indent="0" marL="0">
-              <a:buNone/>
-            </a:pPr>
-            <a:r>
-              <a:rPr lang="en-US" sz="1000" b="1" dirty="0">
+          <p:cNvPr id="30" name="Text 28"/>
+          <p:cNvSpPr/>
+          <p:nvPr/>
+        </p:nvSpPr>
+        <p:spPr>
+          <a:xfrm>
+            <a:off x="4389120" y="4005072"/>
+            <a:ext cx="3291840" cy="201168"/>
+          </a:xfrm>
+          <a:prstGeom prst="rect">
+            <a:avLst/>
+          </a:prstGeom>
+          <a:noFill/>
+          <a:ln/>
+        </p:spPr>
+        <p:txBody>
+          <a:bodyPr wrap="square" rtlCol="0" anchor="ctr"/>
+          <a:lstStyle/>
+          <a:p>
+            <a:pPr indent="0" marL="0">
+              <a:buNone/>
+            </a:pPr>
+            <a:r>
+              <a:rPr lang="en-US" sz="900" b="1" dirty="0">
                 <a:solidFill>
                   <a:srgbClr val="2D7FF9"/>
                 </a:solidFill>
@@ -2803,38 +3627,38 @@
                 <a:ea typeface="Arial" pitchFamily="34" charset="-122"/>
                 <a:cs typeface="Arial" pitchFamily="34" charset="-120"/>
               </a:rPr>
-              <a:t>BUSINESS &amp; CONTRACTING</a:t>
-            </a:r>
-            <a:endParaRPr lang="en-US" sz="1000" dirty="0"/>
-          </a:p>
-        </p:txBody>
-      </p:sp>
-      <p:sp>
-        <p:nvSpPr>
-          <p:cNvPr id="19" name="Text 17"/>
-          <p:cNvSpPr/>
-          <p:nvPr/>
-        </p:nvSpPr>
-        <p:spPr>
-          <a:xfrm>
-            <a:off x="6583680" y="1856232"/>
-            <a:ext cx="4937760" cy="274320"/>
-          </a:xfrm>
-          <a:prstGeom prst="rect">
-            <a:avLst/>
-          </a:prstGeom>
-          <a:noFill/>
-          <a:ln/>
-        </p:spPr>
-        <p:txBody>
-          <a:bodyPr wrap="square" rtlCol="0" anchor="ctr"/>
-          <a:lstStyle/>
-          <a:p>
-            <a:pPr indent="0" marL="0">
-              <a:buNone/>
-            </a:pPr>
-            <a:r>
-              <a:rPr lang="en-US" sz="950" dirty="0">
+              <a:t>Education</a:t>
+            </a:r>
+            <a:endParaRPr lang="en-US" sz="900" dirty="0"/>
+          </a:p>
+        </p:txBody>
+      </p:sp>
+      <p:sp>
+        <p:nvSpPr>
+          <p:cNvPr id="31" name="Text 29"/>
+          <p:cNvSpPr/>
+          <p:nvPr/>
+        </p:nvSpPr>
+        <p:spPr>
+          <a:xfrm>
+            <a:off x="4389120" y="4233672"/>
+            <a:ext cx="3291840" cy="274320"/>
+          </a:xfrm>
+          <a:prstGeom prst="rect">
+            <a:avLst/>
+          </a:prstGeom>
+          <a:noFill/>
+          <a:ln/>
+        </p:spPr>
+        <p:txBody>
+          <a:bodyPr wrap="square" rtlCol="0" anchor="ctr"/>
+          <a:lstStyle/>
+          <a:p>
+            <a:pPr indent="0" marL="0">
+              <a:buNone/>
+            </a:pPr>
+            <a:r>
+              <a:rPr lang="en-US" sz="850" dirty="0">
                 <a:solidFill>
                   <a:srgbClr val="94A3B8"/>
                 </a:solidFill>
@@ -2842,32 +3666,32 @@
                 <a:ea typeface="Arial" pitchFamily="34" charset="-122"/>
                 <a:cs typeface="Arial" pitchFamily="34" charset="-120"/>
               </a:rPr>
-              <a:t>MCE (656K+ SAM.gov records), Pinnacle Business</a:t>
-            </a:r>
-            <a:endParaRPr lang="en-US" sz="950" dirty="0"/>
-          </a:p>
-        </p:txBody>
-      </p:sp>
-      <p:sp>
-        <p:nvSpPr>
-          <p:cNvPr id="20" name="Shape 18"/>
-          <p:cNvSpPr/>
-          <p:nvPr/>
-        </p:nvSpPr>
-        <p:spPr>
-          <a:xfrm>
-            <a:off x="6400800" y="2331720"/>
-            <a:ext cx="5303520" cy="658368"/>
+              <a:t>WholeMind, Life Pals (ISSS), Perfectly Different</a:t>
+            </a:r>
+            <a:endParaRPr lang="en-US" sz="850" dirty="0"/>
+          </a:p>
+        </p:txBody>
+      </p:sp>
+      <p:sp>
+        <p:nvSpPr>
+          <p:cNvPr id="32" name="Shape 30"/>
+          <p:cNvSpPr/>
+          <p:nvPr/>
+        </p:nvSpPr>
+        <p:spPr>
+          <a:xfrm>
+            <a:off x="8046720" y="3977640"/>
+            <a:ext cx="3566160" cy="594360"/>
           </a:xfrm>
           <a:prstGeom prst="roundRect">
             <a:avLst>
-              <a:gd name="adj" fmla="val 6944"/>
+              <a:gd name="adj" fmla="val 6154"/>
             </a:avLst>
           </a:prstGeom>
           <a:solidFill>
-            <a:srgbClr val="1A2332"/>
+            <a:srgbClr val="141B24"/>
           </a:solidFill>
-          <a:ln w="10160">
+          <a:ln w="6350">
             <a:solidFill>
               <a:srgbClr val="10B981"/>
             </a:solidFill>
@@ -2877,30 +3701,30 @@
       </p:sp>
       <p:sp>
         <p:nvSpPr>
-          <p:cNvPr id="21" name="Text 19"/>
-          <p:cNvSpPr/>
-          <p:nvPr/>
-        </p:nvSpPr>
-        <p:spPr>
-          <a:xfrm>
-            <a:off x="6583680" y="2377440"/>
-            <a:ext cx="4937760" cy="274320"/>
-          </a:xfrm>
-          <a:prstGeom prst="rect">
-            <a:avLst/>
-          </a:prstGeom>
-          <a:noFill/>
-          <a:ln/>
-        </p:spPr>
-        <p:txBody>
-          <a:bodyPr wrap="square" rtlCol="0" anchor="ctr"/>
-          <a:lstStyle/>
-          <a:p>
-            <a:pPr indent="0" marL="0">
-              <a:buNone/>
-            </a:pPr>
-            <a:r>
-              <a:rPr lang="en-US" sz="1000" b="1" dirty="0">
+          <p:cNvPr id="33" name="Text 31"/>
+          <p:cNvSpPr/>
+          <p:nvPr/>
+        </p:nvSpPr>
+        <p:spPr>
+          <a:xfrm>
+            <a:off x="8183880" y="4005072"/>
+            <a:ext cx="3291840" cy="201168"/>
+          </a:xfrm>
+          <a:prstGeom prst="rect">
+            <a:avLst/>
+          </a:prstGeom>
+          <a:noFill/>
+          <a:ln/>
+        </p:spPr>
+        <p:txBody>
+          <a:bodyPr wrap="square" rtlCol="0" anchor="ctr"/>
+          <a:lstStyle/>
+          <a:p>
+            <a:pPr indent="0" marL="0">
+              <a:buNone/>
+            </a:pPr>
+            <a:r>
+              <a:rPr lang="en-US" sz="900" b="1" dirty="0">
                 <a:solidFill>
                   <a:srgbClr val="10B981"/>
                 </a:solidFill>
@@ -2908,38 +3732,38 @@
                 <a:ea typeface="Arial" pitchFamily="34" charset="-122"/>
                 <a:cs typeface="Arial" pitchFamily="34" charset="-120"/>
               </a:rPr>
-              <a:t>COMMUNITY RESOURCES</a:t>
-            </a:r>
-            <a:endParaRPr lang="en-US" sz="1000" dirty="0"/>
-          </a:p>
-        </p:txBody>
-      </p:sp>
-      <p:sp>
-        <p:nvSpPr>
-          <p:cNvPr id="22" name="Text 20"/>
-          <p:cNvSpPr/>
-          <p:nvPr/>
-        </p:nvSpPr>
-        <p:spPr>
-          <a:xfrm>
-            <a:off x="6583680" y="2633472"/>
-            <a:ext cx="4937760" cy="274320"/>
-          </a:xfrm>
-          <a:prstGeom prst="rect">
-            <a:avLst/>
-          </a:prstGeom>
-          <a:noFill/>
-          <a:ln/>
-        </p:spPr>
-        <p:txBody>
-          <a:bodyPr wrap="square" rtlCol="0" anchor="ctr"/>
-          <a:lstStyle/>
-          <a:p>
-            <a:pPr indent="0" marL="0">
-              <a:buNone/>
-            </a:pPr>
-            <a:r>
-              <a:rPr lang="en-US" sz="950" dirty="0">
+              <a:t>Operations</a:t>
+            </a:r>
+            <a:endParaRPr lang="en-US" sz="900" dirty="0"/>
+          </a:p>
+        </p:txBody>
+      </p:sp>
+      <p:sp>
+        <p:nvSpPr>
+          <p:cNvPr id="34" name="Text 32"/>
+          <p:cNvSpPr/>
+          <p:nvPr/>
+        </p:nvSpPr>
+        <p:spPr>
+          <a:xfrm>
+            <a:off x="8183880" y="4233672"/>
+            <a:ext cx="3291840" cy="274320"/>
+          </a:xfrm>
+          <a:prstGeom prst="rect">
+            <a:avLst/>
+          </a:prstGeom>
+          <a:noFill/>
+          <a:ln/>
+        </p:spPr>
+        <p:txBody>
+          <a:bodyPr wrap="square" rtlCol="0" anchor="ctr"/>
+          <a:lstStyle/>
+          <a:p>
+            <a:pPr indent="0" marL="0">
+              <a:buNone/>
+            </a:pPr>
+            <a:r>
+              <a:rPr lang="en-US" sz="850" dirty="0">
                 <a:solidFill>
                   <a:srgbClr val="94A3B8"/>
                 </a:solidFill>
@@ -2947,258 +3771,48 @@
                 <a:ea typeface="Arial" pitchFamily="34" charset="-122"/>
                 <a:cs typeface="Arial" pitchFamily="34" charset="-120"/>
               </a:rPr>
-              <a:t>LifeBridge (Virtual 211), WholeMind, Perfectly Different</a:t>
+              <a:t>Ecosystem Nexus, Video Creator AI, Ad Targeting, Speech Bridge, SafeReport</a:t>
+            </a:r>
+            <a:endParaRPr lang="en-US" sz="850" dirty="0"/>
+          </a:p>
+        </p:txBody>
+      </p:sp>
+      <p:sp>
+        <p:nvSpPr>
+          <p:cNvPr id="35" name="Text 33"/>
+          <p:cNvSpPr/>
+          <p:nvPr/>
+        </p:nvSpPr>
+        <p:spPr>
+          <a:xfrm>
+            <a:off x="457200" y="4709160"/>
+            <a:ext cx="10972800" cy="228600"/>
+          </a:xfrm>
+          <a:prstGeom prst="rect">
+            <a:avLst/>
+          </a:prstGeom>
+          <a:noFill/>
+          <a:ln/>
+        </p:spPr>
+        <p:txBody>
+          <a:bodyPr wrap="square" rtlCol="0" anchor="ctr"/>
+          <a:lstStyle/>
+          <a:p>
+            <a:pPr algn="ctr" indent="0" marL="0">
+              <a:buNone/>
+            </a:pPr>
+            <a:r>
+              <a:rPr lang="en-US" sz="950" i="1" dirty="0">
+                <a:solidFill>
+                  <a:srgbClr val="F59E0B"/>
+                </a:solidFill>
+                <a:latin typeface="Arial" pitchFamily="34" charset="0"/>
+                <a:ea typeface="Arial" pitchFamily="34" charset="-122"/>
+                <a:cs typeface="Arial" pitchFamily="34" charset="-120"/>
+              </a:rPr>
+              <a:t>Free for individuals  |  Enterprise licensing for companies &amp; government  |  Platforms coordinate autonomously</a:t>
             </a:r>
             <a:endParaRPr lang="en-US" sz="950" dirty="0"/>
-          </a:p>
-        </p:txBody>
-      </p:sp>
-      <p:sp>
-        <p:nvSpPr>
-          <p:cNvPr id="23" name="Shape 21"/>
-          <p:cNvSpPr/>
-          <p:nvPr/>
-        </p:nvSpPr>
-        <p:spPr>
-          <a:xfrm>
-            <a:off x="6400800" y="3108960"/>
-            <a:ext cx="5303520" cy="658368"/>
-          </a:xfrm>
-          <a:prstGeom prst="roundRect">
-            <a:avLst>
-              <a:gd name="adj" fmla="val 6944"/>
-            </a:avLst>
-          </a:prstGeom>
-          <a:solidFill>
-            <a:srgbClr val="1A2332"/>
-          </a:solidFill>
-          <a:ln w="10160">
-            <a:solidFill>
-              <a:srgbClr val="2D7FF9"/>
-            </a:solidFill>
-            <a:prstDash val="solid"/>
-          </a:ln>
-        </p:spPr>
-      </p:sp>
-      <p:sp>
-        <p:nvSpPr>
-          <p:cNvPr id="24" name="Text 22"/>
-          <p:cNvSpPr/>
-          <p:nvPr/>
-        </p:nvSpPr>
-        <p:spPr>
-          <a:xfrm>
-            <a:off x="6583680" y="3154680"/>
-            <a:ext cx="4937760" cy="274320"/>
-          </a:xfrm>
-          <a:prstGeom prst="rect">
-            <a:avLst/>
-          </a:prstGeom>
-          <a:noFill/>
-          <a:ln/>
-        </p:spPr>
-        <p:txBody>
-          <a:bodyPr wrap="square" rtlCol="0" anchor="ctr"/>
-          <a:lstStyle/>
-          <a:p>
-            <a:pPr indent="0" marL="0">
-              <a:buNone/>
-            </a:pPr>
-            <a:r>
-              <a:rPr lang="en-US" sz="1000" b="1" dirty="0">
-                <a:solidFill>
-                  <a:srgbClr val="2D7FF9"/>
-                </a:solidFill>
-                <a:latin typeface="Arial" pitchFamily="34" charset="0"/>
-                <a:ea typeface="Arial" pitchFamily="34" charset="-122"/>
-                <a:cs typeface="Arial" pitchFamily="34" charset="-120"/>
-              </a:rPr>
-              <a:t>GOVERNANCE &amp; SCIENCE</a:t>
-            </a:r>
-            <a:endParaRPr lang="en-US" sz="1000" dirty="0"/>
-          </a:p>
-        </p:txBody>
-      </p:sp>
-      <p:sp>
-        <p:nvSpPr>
-          <p:cNvPr id="25" name="Text 23"/>
-          <p:cNvSpPr/>
-          <p:nvPr/>
-        </p:nvSpPr>
-        <p:spPr>
-          <a:xfrm>
-            <a:off x="6583680" y="3410712"/>
-            <a:ext cx="4937760" cy="274320"/>
-          </a:xfrm>
-          <a:prstGeom prst="rect">
-            <a:avLst/>
-          </a:prstGeom>
-          <a:noFill/>
-          <a:ln/>
-        </p:spPr>
-        <p:txBody>
-          <a:bodyPr wrap="square" rtlCol="0" anchor="ctr"/>
-          <a:lstStyle/>
-          <a:p>
-            <a:pPr indent="0" marL="0">
-              <a:buNone/>
-            </a:pPr>
-            <a:r>
-              <a:rPr lang="en-US" sz="950" dirty="0">
-                <a:solidFill>
-                  <a:srgbClr val="94A3B8"/>
-                </a:solidFill>
-                <a:latin typeface="Arial" pitchFamily="34" charset="0"/>
-                <a:ea typeface="Arial" pitchFamily="34" charset="-122"/>
-                <a:cs typeface="Arial" pitchFamily="34" charset="-120"/>
-              </a:rPr>
-              <a:t>Better Science Lab / RPLICE, Ecosystem Nexus</a:t>
-            </a:r>
-            <a:endParaRPr lang="en-US" sz="950" dirty="0"/>
-          </a:p>
-        </p:txBody>
-      </p:sp>
-      <p:sp>
-        <p:nvSpPr>
-          <p:cNvPr id="26" name="Shape 24"/>
-          <p:cNvSpPr/>
-          <p:nvPr/>
-        </p:nvSpPr>
-        <p:spPr>
-          <a:xfrm>
-            <a:off x="6400800" y="3886200"/>
-            <a:ext cx="5303520" cy="658368"/>
-          </a:xfrm>
-          <a:prstGeom prst="roundRect">
-            <a:avLst>
-              <a:gd name="adj" fmla="val 6944"/>
-            </a:avLst>
-          </a:prstGeom>
-          <a:solidFill>
-            <a:srgbClr val="1A2332"/>
-          </a:solidFill>
-          <a:ln w="10160">
-            <a:solidFill>
-              <a:srgbClr val="10B981"/>
-            </a:solidFill>
-            <a:prstDash val="solid"/>
-          </a:ln>
-        </p:spPr>
-      </p:sp>
-      <p:sp>
-        <p:nvSpPr>
-          <p:cNvPr id="27" name="Text 25"/>
-          <p:cNvSpPr/>
-          <p:nvPr/>
-        </p:nvSpPr>
-        <p:spPr>
-          <a:xfrm>
-            <a:off x="6583680" y="3931920"/>
-            <a:ext cx="4937760" cy="274320"/>
-          </a:xfrm>
-          <a:prstGeom prst="rect">
-            <a:avLst/>
-          </a:prstGeom>
-          <a:noFill/>
-          <a:ln/>
-        </p:spPr>
-        <p:txBody>
-          <a:bodyPr wrap="square" rtlCol="0" anchor="ctr"/>
-          <a:lstStyle/>
-          <a:p>
-            <a:pPr indent="0" marL="0">
-              <a:buNone/>
-            </a:pPr>
-            <a:r>
-              <a:rPr lang="en-US" sz="1000" b="1" dirty="0">
-                <a:solidFill>
-                  <a:srgbClr val="10B981"/>
-                </a:solidFill>
-                <a:latin typeface="Arial" pitchFamily="34" charset="0"/>
-                <a:ea typeface="Arial" pitchFamily="34" charset="-122"/>
-                <a:cs typeface="Arial" pitchFamily="34" charset="-120"/>
-              </a:rPr>
-              <a:t>CONTENT &amp; MARKETING</a:t>
-            </a:r>
-            <a:endParaRPr lang="en-US" sz="1000" dirty="0"/>
-          </a:p>
-        </p:txBody>
-      </p:sp>
-      <p:sp>
-        <p:nvSpPr>
-          <p:cNvPr id="28" name="Text 26"/>
-          <p:cNvSpPr/>
-          <p:nvPr/>
-        </p:nvSpPr>
-        <p:spPr>
-          <a:xfrm>
-            <a:off x="6583680" y="4187952"/>
-            <a:ext cx="4937760" cy="274320"/>
-          </a:xfrm>
-          <a:prstGeom prst="rect">
-            <a:avLst/>
-          </a:prstGeom>
-          <a:noFill/>
-          <a:ln/>
-        </p:spPr>
-        <p:txBody>
-          <a:bodyPr wrap="square" rtlCol="0" anchor="ctr"/>
-          <a:lstStyle/>
-          <a:p>
-            <a:pPr indent="0" marL="0">
-              <a:buNone/>
-            </a:pPr>
-            <a:r>
-              <a:rPr lang="en-US" sz="950" dirty="0">
-                <a:solidFill>
-                  <a:srgbClr val="94A3B8"/>
-                </a:solidFill>
-                <a:latin typeface="Arial" pitchFamily="34" charset="0"/>
-                <a:ea typeface="Arial" pitchFamily="34" charset="-122"/>
-                <a:cs typeface="Arial" pitchFamily="34" charset="-120"/>
-              </a:rPr>
-              <a:t>Video Creator AI, Ad Targeting, Speech Bridge</a:t>
-            </a:r>
-            <a:endParaRPr lang="en-US" sz="950" dirty="0"/>
-          </a:p>
-        </p:txBody>
-      </p:sp>
-      <p:sp>
-        <p:nvSpPr>
-          <p:cNvPr id="29" name="Text 27"/>
-          <p:cNvSpPr/>
-          <p:nvPr/>
-        </p:nvSpPr>
-        <p:spPr>
-          <a:xfrm>
-            <a:off x="731520" y="4754880"/>
-            <a:ext cx="10515600" cy="274320"/>
-          </a:xfrm>
-          <a:prstGeom prst="rect">
-            <a:avLst/>
-          </a:prstGeom>
-          <a:noFill/>
-          <a:ln/>
-        </p:spPr>
-        <p:txBody>
-          <a:bodyPr wrap="square" rtlCol="0" anchor="ctr"/>
-          <a:lstStyle/>
-          <a:p>
-            <a:pPr algn="ctr" indent="0" marL="0">
-              <a:buNone/>
-            </a:pPr>
-            <a:r>
-              <a:rPr lang="en-US" sz="1000" i="1" dirty="0">
-                <a:solidFill>
-                  <a:srgbClr val="F59E0B"/>
-                </a:solidFill>
-                <a:latin typeface="Arial" pitchFamily="34" charset="0"/>
-                <a:ea typeface="Arial" pitchFamily="34" charset="-122"/>
-                <a:cs typeface="Arial" pitchFamily="34" charset="-120"/>
-              </a:rPr>
-              <a:t>Free for individuals  |  Enterprise licensing for companies &amp; government  |  All platforms coordinate autonomously</a:t>
-            </a:r>
-            <a:endParaRPr lang="en-US" sz="1000" dirty="0"/>
           </a:p>
         </p:txBody>
       </p:sp>
@@ -3262,24 +3876,24 @@
         </p:nvSpPr>
         <p:spPr>
           <a:xfrm>
-            <a:off x="731520" y="365760"/>
-            <a:ext cx="10058400" cy="457200"/>
-          </a:xfrm>
-          <a:prstGeom prst="rect">
-            <a:avLst/>
-          </a:prstGeom>
-          <a:noFill/>
-          <a:ln/>
-        </p:spPr>
-        <p:txBody>
-          <a:bodyPr wrap="square" rtlCol="0" anchor="ctr"/>
-          <a:lstStyle/>
-          <a:p>
-            <a:pPr indent="0" marL="0">
-              <a:buNone/>
-            </a:pPr>
-            <a:r>
-              <a:rPr lang="en-US" sz="1400" b="1" dirty="0">
+            <a:off x="731520" y="320040"/>
+            <a:ext cx="10058400" cy="365760"/>
+          </a:xfrm>
+          <a:prstGeom prst="rect">
+            <a:avLst/>
+          </a:prstGeom>
+          <a:noFill/>
+          <a:ln/>
+        </p:spPr>
+        <p:txBody>
+          <a:bodyPr wrap="square" rtlCol="0" anchor="ctr"/>
+          <a:lstStyle/>
+          <a:p>
+            <a:pPr indent="0" marL="0">
+              <a:buNone/>
+            </a:pPr>
+            <a:r>
+              <a:rPr lang="en-US" sz="1300" b="1" dirty="0">
                 <a:solidFill>
                   <a:srgbClr val="F59E0B"/>
                 </a:solidFill>
@@ -3289,7 +3903,7 @@
               </a:rPr>
               <a:t>TRACTION &amp; REAL TALK</a:t>
             </a:r>
-            <a:endParaRPr lang="en-US" sz="1400" dirty="0"/>
+            <a:endParaRPr lang="en-US" sz="1300" dirty="0"/>
           </a:p>
         </p:txBody>
       </p:sp>
@@ -3301,8 +3915,8 @@
         </p:nvSpPr>
         <p:spPr>
           <a:xfrm>
-            <a:off x="731520" y="1005840"/>
-            <a:ext cx="5029200" cy="365760"/>
+            <a:off x="731520" y="822960"/>
+            <a:ext cx="5029200" cy="320040"/>
           </a:xfrm>
           <a:prstGeom prst="rect">
             <a:avLst/>
@@ -3326,7 +3940,7 @@
                 <a:ea typeface="Arial" pitchFamily="34" charset="-122"/>
                 <a:cs typeface="Arial" pitchFamily="34" charset="-120"/>
               </a:rPr>
-              <a:t>What's Live</a:t>
+              <a:t>What's Live &amp; Verified</a:t>
             </a:r>
             <a:endParaRPr lang="en-US" sz="1600" dirty="0"/>
           </a:p>
@@ -3340,8 +3954,8 @@
         </p:nvSpPr>
         <p:spPr>
           <a:xfrm>
-            <a:off x="914400" y="1417320"/>
-            <a:ext cx="5029200" cy="274320"/>
+            <a:off x="914400" y="1234440"/>
+            <a:ext cx="5029200" cy="256032"/>
           </a:xfrm>
           <a:prstGeom prst="rect">
             <a:avLst/>
@@ -3358,7 +3972,7 @@
               <a:buChar char="•"/>
             </a:pPr>
             <a:r>
-              <a:rPr lang="en-US" sz="1050" dirty="0">
+              <a:rPr lang="en-US" sz="1000" dirty="0">
                 <a:solidFill>
                   <a:srgbClr val="94A3B8"/>
                 </a:solidFill>
@@ -3368,7 +3982,7 @@
               </a:rPr>
               <a:t>23 platforms built and operational</a:t>
             </a:r>
-            <a:endParaRPr lang="en-US" sz="1050" dirty="0"/>
+            <a:endParaRPr lang="en-US" sz="1000" dirty="0"/>
           </a:p>
         </p:txBody>
       </p:sp>
@@ -3380,8 +3994,8 @@
         </p:nvSpPr>
         <p:spPr>
           <a:xfrm>
-            <a:off x="914400" y="1709928"/>
-            <a:ext cx="5029200" cy="274320"/>
+            <a:off x="914400" y="1508760"/>
+            <a:ext cx="5029200" cy="256032"/>
           </a:xfrm>
           <a:prstGeom prst="rect">
             <a:avLst/>
@@ -3398,7 +4012,7 @@
               <a:buChar char="•"/>
             </a:pPr>
             <a:r>
-              <a:rPr lang="en-US" sz="1050" dirty="0">
+              <a:rPr lang="en-US" sz="1000" dirty="0">
                 <a:solidFill>
                   <a:srgbClr val="94A3B8"/>
                 </a:solidFill>
@@ -3408,7 +4022,7 @@
               </a:rPr>
               <a:t>16 of 23 online today, 7 deploying</a:t>
             </a:r>
-            <a:endParaRPr lang="en-US" sz="1050" dirty="0"/>
+            <a:endParaRPr lang="en-US" sz="1000" dirty="0"/>
           </a:p>
         </p:txBody>
       </p:sp>
@@ -3420,8 +4034,8 @@
         </p:nvSpPr>
         <p:spPr>
           <a:xfrm>
-            <a:off x="914400" y="2002536"/>
-            <a:ext cx="5029200" cy="274320"/>
+            <a:off x="914400" y="1783080"/>
+            <a:ext cx="5029200" cy="256032"/>
           </a:xfrm>
           <a:prstGeom prst="rect">
             <a:avLst/>
@@ -3438,7 +4052,7 @@
               <a:buChar char="•"/>
             </a:pPr>
             <a:r>
-              <a:rPr lang="en-US" sz="1050" dirty="0">
+              <a:rPr lang="en-US" sz="1000" dirty="0">
                 <a:solidFill>
                   <a:srgbClr val="94A3B8"/>
                 </a:solidFill>
@@ -3446,9 +4060,9 @@
                 <a:ea typeface="Arial" pitchFamily="34" charset="-122"/>
                 <a:cs typeface="Arial" pitchFamily="34" charset="-120"/>
               </a:rPr>
-              <a:t>4 active grants in pipeline:</a:t>
-            </a:r>
-            <a:endParaRPr lang="en-US" sz="1050" dirty="0"/>
+              <a:t>Active grants in pipeline:</a:t>
+            </a:r>
+            <a:endParaRPr lang="en-US" sz="1000" dirty="0"/>
           </a:p>
         </p:txBody>
       </p:sp>
@@ -3460,24 +4074,24 @@
         </p:nvSpPr>
         <p:spPr>
           <a:xfrm>
-            <a:off x="1463040" y="2295144"/>
-            <a:ext cx="5029200" cy="274320"/>
-          </a:xfrm>
-          <a:prstGeom prst="rect">
-            <a:avLst/>
-          </a:prstGeom>
-          <a:noFill/>
-          <a:ln/>
-        </p:spPr>
-        <p:txBody>
-          <a:bodyPr wrap="square" rtlCol="0" anchor="ctr"/>
-          <a:lstStyle/>
-          <a:p>
-            <a:pPr indent="0" marL="0">
-              <a:buNone/>
-            </a:pPr>
-            <a:r>
-              <a:rPr lang="en-US" sz="1050" dirty="0">
+            <a:off x="1371600" y="2057400"/>
+            <a:ext cx="5029200" cy="256032"/>
+          </a:xfrm>
+          <a:prstGeom prst="rect">
+            <a:avLst/>
+          </a:prstGeom>
+          <a:noFill/>
+          <a:ln/>
+        </p:spPr>
+        <p:txBody>
+          <a:bodyPr wrap="square" rtlCol="0" anchor="ctr"/>
+          <a:lstStyle/>
+          <a:p>
+            <a:pPr indent="0" marL="0">
+              <a:buNone/>
+            </a:pPr>
+            <a:r>
+              <a:rPr lang="en-US" sz="1000" dirty="0">
                 <a:solidFill>
                   <a:srgbClr val="2D7FF9"/>
                 </a:solidFill>
@@ -3485,9 +4099,9 @@
                 <a:ea typeface="Arial" pitchFamily="34" charset="-122"/>
                 <a:cs typeface="Arial" pitchFamily="34" charset="-120"/>
               </a:rPr>
-              <a:t>WIOA ($200K–$500K)</a:t>
-            </a:r>
-            <a:endParaRPr lang="en-US" sz="1050" dirty="0"/>
+              <a:t>→ WIOA ($200K–$500K)</a:t>
+            </a:r>
+            <a:endParaRPr lang="en-US" sz="1000" dirty="0"/>
           </a:p>
         </p:txBody>
       </p:sp>
@@ -3499,24 +4113,24 @@
         </p:nvSpPr>
         <p:spPr>
           <a:xfrm>
-            <a:off x="1463040" y="2587752"/>
-            <a:ext cx="5029200" cy="274320"/>
-          </a:xfrm>
-          <a:prstGeom prst="rect">
-            <a:avLst/>
-          </a:prstGeom>
-          <a:noFill/>
-          <a:ln/>
-        </p:spPr>
-        <p:txBody>
-          <a:bodyPr wrap="square" rtlCol="0" anchor="ctr"/>
-          <a:lstStyle/>
-          <a:p>
-            <a:pPr indent="0" marL="0">
-              <a:buNone/>
-            </a:pPr>
-            <a:r>
-              <a:rPr lang="en-US" sz="1050" dirty="0">
+            <a:off x="1371600" y="2331720"/>
+            <a:ext cx="5029200" cy="256032"/>
+          </a:xfrm>
+          <a:prstGeom prst="rect">
+            <a:avLst/>
+          </a:prstGeom>
+          <a:noFill/>
+          <a:ln/>
+        </p:spPr>
+        <p:txBody>
+          <a:bodyPr wrap="square" rtlCol="0" anchor="ctr"/>
+          <a:lstStyle/>
+          <a:p>
+            <a:pPr indent="0" marL="0">
+              <a:buNone/>
+            </a:pPr>
+            <a:r>
+              <a:rPr lang="en-US" sz="1000" dirty="0">
                 <a:solidFill>
                   <a:srgbClr val="2D7FF9"/>
                 </a:solidFill>
@@ -3524,9 +4138,9 @@
                 <a:ea typeface="Arial" pitchFamily="34" charset="-122"/>
                 <a:cs typeface="Arial" pitchFamily="34" charset="-120"/>
               </a:rPr>
-              <a:t>Foundation ($100K–$500K)</a:t>
-            </a:r>
-            <a:endParaRPr lang="en-US" sz="1050" dirty="0"/>
+              <a:t>→ Foundation ($100K–$500K)</a:t>
+            </a:r>
+            <a:endParaRPr lang="en-US" sz="1000" dirty="0"/>
           </a:p>
         </p:txBody>
       </p:sp>
@@ -3538,24 +4152,24 @@
         </p:nvSpPr>
         <p:spPr>
           <a:xfrm>
-            <a:off x="1463040" y="2880360"/>
-            <a:ext cx="5029200" cy="274320"/>
-          </a:xfrm>
-          <a:prstGeom prst="rect">
-            <a:avLst/>
-          </a:prstGeom>
-          <a:noFill/>
-          <a:ln/>
-        </p:spPr>
-        <p:txBody>
-          <a:bodyPr wrap="square" rtlCol="0" anchor="ctr"/>
-          <a:lstStyle/>
-          <a:p>
-            <a:pPr indent="0" marL="0">
-              <a:buNone/>
-            </a:pPr>
-            <a:r>
-              <a:rPr lang="en-US" sz="1050" dirty="0">
+            <a:off x="1371600" y="2606040"/>
+            <a:ext cx="5029200" cy="256032"/>
+          </a:xfrm>
+          <a:prstGeom prst="rect">
+            <a:avLst/>
+          </a:prstGeom>
+          <a:noFill/>
+          <a:ln/>
+        </p:spPr>
+        <p:txBody>
+          <a:bodyPr wrap="square" rtlCol="0" anchor="ctr"/>
+          <a:lstStyle/>
+          <a:p>
+            <a:pPr indent="0" marL="0">
+              <a:buNone/>
+            </a:pPr>
+            <a:r>
+              <a:rPr lang="en-US" sz="1000" dirty="0">
                 <a:solidFill>
                   <a:srgbClr val="2D7FF9"/>
                 </a:solidFill>
@@ -3563,9 +4177,9 @@
                 <a:ea typeface="Arial" pitchFamily="34" charset="-122"/>
                 <a:cs typeface="Arial" pitchFamily="34" charset="-120"/>
               </a:rPr>
-              <a:t>St. David's (up to $1M)</a:t>
-            </a:r>
-            <a:endParaRPr lang="en-US" sz="1050" dirty="0"/>
+              <a:t>→ St. David's (up to $1M)</a:t>
+            </a:r>
+            <a:endParaRPr lang="en-US" sz="1000" dirty="0"/>
           </a:p>
         </p:txBody>
       </p:sp>
@@ -3577,24 +4191,24 @@
         </p:nvSpPr>
         <p:spPr>
           <a:xfrm>
-            <a:off x="1463040" y="3172968"/>
-            <a:ext cx="5029200" cy="274320"/>
-          </a:xfrm>
-          <a:prstGeom prst="rect">
-            <a:avLst/>
-          </a:prstGeom>
-          <a:noFill/>
-          <a:ln/>
-        </p:spPr>
-        <p:txBody>
-          <a:bodyPr wrap="square" rtlCol="0" anchor="ctr"/>
-          <a:lstStyle/>
-          <a:p>
-            <a:pPr indent="0" marL="0">
-              <a:buNone/>
-            </a:pPr>
-            <a:r>
-              <a:rPr lang="en-US" sz="1050" dirty="0">
+            <a:off x="1371600" y="2880360"/>
+            <a:ext cx="5029200" cy="256032"/>
+          </a:xfrm>
+          <a:prstGeom prst="rect">
+            <a:avLst/>
+          </a:prstGeom>
+          <a:noFill/>
+          <a:ln/>
+        </p:spPr>
+        <p:txBody>
+          <a:bodyPr wrap="square" rtlCol="0" anchor="ctr"/>
+          <a:lstStyle/>
+          <a:p>
+            <a:pPr indent="0" marL="0">
+              <a:buNone/>
+            </a:pPr>
+            <a:r>
+              <a:rPr lang="en-US" sz="1000" dirty="0">
                 <a:solidFill>
                   <a:srgbClr val="2D7FF9"/>
                 </a:solidFill>
@@ -3602,9 +4216,9 @@
                 <a:ea typeface="Arial" pitchFamily="34" charset="-122"/>
                 <a:cs typeface="Arial" pitchFamily="34" charset="-120"/>
               </a:rPr>
-              <a:t>SSG Fox VA ($750K)</a:t>
-            </a:r>
-            <a:endParaRPr lang="en-US" sz="1050" dirty="0"/>
+              <a:t>→ SSG Fox VA ($750K)</a:t>
+            </a:r>
+            <a:endParaRPr lang="en-US" sz="1000" dirty="0"/>
           </a:p>
         </p:txBody>
       </p:sp>
@@ -3616,8 +4230,8 @@
         </p:nvSpPr>
         <p:spPr>
           <a:xfrm>
-            <a:off x="914400" y="3465576"/>
-            <a:ext cx="5029200" cy="274320"/>
+            <a:off x="914400" y="3154680"/>
+            <a:ext cx="5029200" cy="256032"/>
           </a:xfrm>
           <a:prstGeom prst="rect">
             <a:avLst/>
@@ -3634,7 +4248,7 @@
               <a:buChar char="•"/>
             </a:pPr>
             <a:r>
-              <a:rPr lang="en-US" sz="1050" dirty="0">
+              <a:rPr lang="en-US" sz="1000" dirty="0">
                 <a:solidFill>
                   <a:srgbClr val="94A3B8"/>
                 </a:solidFill>
@@ -3642,9 +4256,9 @@
                 <a:ea typeface="Arial" pitchFamily="34" charset="-122"/>
                 <a:cs typeface="Arial" pitchFamily="34" charset="-120"/>
               </a:rPr>
-              <a:t>Live API ecosystem — platforms coordinate autonomously</a:t>
-            </a:r>
-            <a:endParaRPr lang="en-US" sz="1050" dirty="0"/>
+              <a:t>Bilateral collaboration with AGOS Core — live</a:t>
+            </a:r>
+            <a:endParaRPr lang="en-US" sz="1000" dirty="0"/>
           </a:p>
         </p:txBody>
       </p:sp>
@@ -3656,8 +4270,8 @@
         </p:nvSpPr>
         <p:spPr>
           <a:xfrm>
-            <a:off x="914400" y="3758184"/>
-            <a:ext cx="5029200" cy="274320"/>
+            <a:off x="914400" y="3429000"/>
+            <a:ext cx="5029200" cy="256032"/>
           </a:xfrm>
           <a:prstGeom prst="rect">
             <a:avLst/>
@@ -3674,7 +4288,7 @@
               <a:buChar char="•"/>
             </a:pPr>
             <a:r>
-              <a:rPr lang="en-US" sz="1050" dirty="0">
+              <a:rPr lang="en-US" sz="1000" dirty="0">
                 <a:solidFill>
                   <a:srgbClr val="94A3B8"/>
                 </a:solidFill>
@@ -3682,9 +4296,9 @@
                 <a:ea typeface="Arial" pitchFamily="34" charset="-122"/>
                 <a:cs typeface="Arial" pitchFamily="34" charset="-120"/>
               </a:rPr>
-              <a:t>Bilateral collaboration with partner ecosystems</a:t>
-            </a:r>
-            <a:endParaRPr lang="en-US" sz="1050" dirty="0"/>
+              <a:t>5 improvements adopted from partner ecosystem</a:t>
+            </a:r>
+            <a:endParaRPr lang="en-US" sz="1000" dirty="0"/>
           </a:p>
         </p:txBody>
       </p:sp>
@@ -3696,8 +4310,8 @@
         </p:nvSpPr>
         <p:spPr>
           <a:xfrm>
-            <a:off x="914400" y="4050792"/>
-            <a:ext cx="5029200" cy="274320"/>
+            <a:off x="914400" y="3703320"/>
+            <a:ext cx="5029200" cy="256032"/>
           </a:xfrm>
           <a:prstGeom prst="rect">
             <a:avLst/>
@@ -3714,7 +4328,7 @@
               <a:buChar char="•"/>
             </a:pPr>
             <a:r>
-              <a:rPr lang="en-US" sz="1050" dirty="0">
+              <a:rPr lang="en-US" sz="1000" dirty="0">
                 <a:solidFill>
                   <a:srgbClr val="94A3B8"/>
                 </a:solidFill>
@@ -3722,9 +4336,9 @@
                 <a:ea typeface="Arial" pitchFamily="34" charset="-122"/>
                 <a:cs typeface="Arial" pitchFamily="34" charset="-120"/>
               </a:rPr>
-              <a:t>Capability Orchestration Map (who leads, who supports)</a:t>
-            </a:r>
-            <a:endParaRPr lang="en-US" sz="1050" dirty="0"/>
+              <a:t>Capability portfolio ready for enterprise sales</a:t>
+            </a:r>
+            <a:endParaRPr lang="en-US" sz="1000" dirty="0"/>
           </a:p>
         </p:txBody>
       </p:sp>
@@ -3736,8 +4350,8 @@
         </p:nvSpPr>
         <p:spPr>
           <a:xfrm>
-            <a:off x="914400" y="4343400"/>
-            <a:ext cx="5029200" cy="274320"/>
+            <a:off x="914400" y="3977640"/>
+            <a:ext cx="5029200" cy="256032"/>
           </a:xfrm>
           <a:prstGeom prst="rect">
             <a:avLst/>
@@ -3754,7 +4368,7 @@
               <a:buChar char="•"/>
             </a:pPr>
             <a:r>
-              <a:rPr lang="en-US" sz="1050" dirty="0">
+              <a:rPr lang="en-US" sz="1000" dirty="0">
                 <a:solidFill>
                   <a:srgbClr val="94A3B8"/>
                 </a:solidFill>
@@ -3762,9 +4376,9 @@
                 <a:ea typeface="Arial" pitchFamily="34" charset="-122"/>
                 <a:cs typeface="Arial" pitchFamily="34" charset="-120"/>
               </a:rPr>
-              <a:t>Pre-Build Gate preventing duplicated work</a:t>
-            </a:r>
-            <a:endParaRPr lang="en-US" sz="1050" dirty="0"/>
+              <a:t>750+ API routes, 5,200+ testable components</a:t>
+            </a:r>
+            <a:endParaRPr lang="en-US" sz="1000" dirty="0"/>
           </a:p>
         </p:txBody>
       </p:sp>
@@ -3776,24 +4390,24 @@
         </p:nvSpPr>
         <p:spPr>
           <a:xfrm>
-            <a:off x="6400800" y="1005840"/>
-            <a:ext cx="5029200" cy="365760"/>
-          </a:xfrm>
-          <a:prstGeom prst="rect">
-            <a:avLst/>
-          </a:prstGeom>
-          <a:noFill/>
-          <a:ln/>
-        </p:spPr>
-        <p:txBody>
-          <a:bodyPr wrap="square" rtlCol="0" anchor="ctr"/>
-          <a:lstStyle/>
-          <a:p>
-            <a:pPr indent="0" marL="0">
-              <a:buNone/>
-            </a:pPr>
-            <a:r>
-              <a:rPr lang="en-US" sz="1600" b="1" dirty="0">
+            <a:off x="6400800" y="822960"/>
+            <a:ext cx="5029200" cy="320040"/>
+          </a:xfrm>
+          <a:prstGeom prst="rect">
+            <a:avLst/>
+          </a:prstGeom>
+          <a:noFill/>
+          <a:ln/>
+        </p:spPr>
+        <p:txBody>
+          <a:bodyPr wrap="square" rtlCol="0" anchor="ctr"/>
+          <a:lstStyle/>
+          <a:p>
+            <a:pPr indent="0" marL="0">
+              <a:buNone/>
+            </a:pPr>
+            <a:r>
+              <a:rPr lang="en-US" sz="1400" b="1" dirty="0">
                 <a:solidFill>
                   <a:srgbClr val="FFFFFF"/>
                 </a:solidFill>
@@ -3801,9 +4415,9 @@
                 <a:ea typeface="Arial" pitchFamily="34" charset="-122"/>
                 <a:cs typeface="Arial" pitchFamily="34" charset="-120"/>
               </a:rPr>
-              <a:t>Where We've Failed</a:t>
-            </a:r>
-            <a:endParaRPr lang="en-US" sz="1600" dirty="0"/>
+              <a:t>Where I've Failed — And What It Taught Me</a:t>
+            </a:r>
+            <a:endParaRPr lang="en-US" sz="1400" dirty="0"/>
           </a:p>
         </p:txBody>
       </p:sp>
@@ -3815,8 +4429,8 @@
         </p:nvSpPr>
         <p:spPr>
           <a:xfrm>
-            <a:off x="6400800" y="1417320"/>
-            <a:ext cx="36576" cy="640080"/>
+            <a:off x="6400800" y="1234440"/>
+            <a:ext cx="45720" cy="713232"/>
           </a:xfrm>
           <a:prstGeom prst="rect">
             <a:avLst/>
@@ -3835,8 +4449,8 @@
         </p:nvSpPr>
         <p:spPr>
           <a:xfrm>
-            <a:off x="6675120" y="1417320"/>
-            <a:ext cx="4572000" cy="256032"/>
+            <a:off x="6675120" y="1234440"/>
+            <a:ext cx="4754880" cy="256032"/>
           </a:xfrm>
           <a:prstGeom prst="rect">
             <a:avLst/>
@@ -3860,7 +4474,7 @@
                 <a:ea typeface="Arial" pitchFamily="34" charset="-122"/>
                 <a:cs typeface="Arial" pitchFamily="34" charset="-120"/>
               </a:rPr>
-              <a:t>Built in silos early on</a:t>
+              <a:t>Started as Integrated Services and Solutions</a:t>
             </a:r>
             <a:endParaRPr lang="en-US" sz="1100" dirty="0"/>
           </a:p>
@@ -3874,8 +4488,8 @@
         </p:nvSpPr>
         <p:spPr>
           <a:xfrm>
-            <a:off x="6675120" y="1673352"/>
-            <a:ext cx="4572000" cy="384048"/>
+            <a:off x="6675120" y="1508760"/>
+            <a:ext cx="4754880" cy="457200"/>
           </a:xfrm>
           <a:prstGeom prst="rect">
             <a:avLst/>
@@ -3889,7 +4503,7 @@
           <a:p>
             <a:pPr indent="0" marL="0">
               <a:lnSpc>
-                <a:spcPct val="110000"/>
+                <a:spcPct val="115000"/>
               </a:lnSpc>
               <a:buNone/>
             </a:pPr>
@@ -3902,7 +4516,7 @@
                 <a:ea typeface="Arial" pitchFamily="34" charset="-122"/>
                 <a:cs typeface="Arial" pitchFamily="34" charset="-120"/>
               </a:rPr>
-              <a:t>Platforms didn't talk to each other. Had to rebuild the entire connector architecture from scratch.</a:t>
+              <a:t>Tried to do everything under one brand. No ecosystem thinking. No coordination architecture. It didn't scale.</a:t>
             </a:r>
             <a:endParaRPr lang="en-US" sz="950" dirty="0"/>
           </a:p>
@@ -3916,8 +4530,109 @@
         </p:nvSpPr>
         <p:spPr>
           <a:xfrm>
-            <a:off x="6400800" y="2194560"/>
-            <a:ext cx="36576" cy="640080"/>
+            <a:off x="6400800" y="2103120"/>
+            <a:ext cx="45720" cy="713232"/>
+          </a:xfrm>
+          <a:prstGeom prst="rect">
+            <a:avLst/>
+          </a:prstGeom>
+          <a:solidFill>
+            <a:srgbClr val="EF4444"/>
+          </a:solidFill>
+          <a:ln/>
+        </p:spPr>
+      </p:sp>
+      <p:sp>
+        <p:nvSpPr>
+          <p:cNvPr id="21" name="Text 19"/>
+          <p:cNvSpPr/>
+          <p:nvPr/>
+        </p:nvSpPr>
+        <p:spPr>
+          <a:xfrm>
+            <a:off x="6675120" y="2103120"/>
+            <a:ext cx="4754880" cy="256032"/>
+          </a:xfrm>
+          <a:prstGeom prst="rect">
+            <a:avLst/>
+          </a:prstGeom>
+          <a:noFill/>
+          <a:ln/>
+        </p:spPr>
+        <p:txBody>
+          <a:bodyPr wrap="square" rtlCol="0" anchor="ctr"/>
+          <a:lstStyle/>
+          <a:p>
+            <a:pPr indent="0" marL="0">
+              <a:buNone/>
+            </a:pPr>
+            <a:r>
+              <a:rPr lang="en-US" sz="1100" b="1" dirty="0">
+                <a:solidFill>
+                  <a:srgbClr val="FFFFFF"/>
+                </a:solidFill>
+                <a:latin typeface="Arial" pitchFamily="34" charset="0"/>
+                <a:ea typeface="Arial" pitchFamily="34" charset="-122"/>
+                <a:cs typeface="Arial" pitchFamily="34" charset="-120"/>
+              </a:rPr>
+              <a:t>Built in silos for years</a:t>
+            </a:r>
+            <a:endParaRPr lang="en-US" sz="1100" dirty="0"/>
+          </a:p>
+        </p:txBody>
+      </p:sp>
+      <p:sp>
+        <p:nvSpPr>
+          <p:cNvPr id="22" name="Text 20"/>
+          <p:cNvSpPr/>
+          <p:nvPr/>
+        </p:nvSpPr>
+        <p:spPr>
+          <a:xfrm>
+            <a:off x="6675120" y="2377440"/>
+            <a:ext cx="4754880" cy="457200"/>
+          </a:xfrm>
+          <a:prstGeom prst="rect">
+            <a:avLst/>
+          </a:prstGeom>
+          <a:noFill/>
+          <a:ln/>
+        </p:spPr>
+        <p:txBody>
+          <a:bodyPr wrap="square" rtlCol="0" anchor="ctr"/>
+          <a:lstStyle/>
+          <a:p>
+            <a:pPr indent="0" marL="0">
+              <a:lnSpc>
+                <a:spcPct val="115000"/>
+              </a:lnSpc>
+              <a:buNone/>
+            </a:pPr>
+            <a:r>
+              <a:rPr lang="en-US" sz="950" dirty="0">
+                <a:solidFill>
+                  <a:srgbClr val="94A3B8"/>
+                </a:solidFill>
+                <a:latin typeface="Arial" pitchFamily="34" charset="0"/>
+                <a:ea typeface="Arial" pitchFamily="34" charset="-122"/>
+                <a:cs typeface="Arial" pitchFamily="34" charset="-120"/>
+              </a:rPr>
+              <a:t>Platforms didn't talk to each other. Rebuilt the entire architecture from scratch to make them interdependent.</a:t>
+            </a:r>
+            <a:endParaRPr lang="en-US" sz="950" dirty="0"/>
+          </a:p>
+        </p:txBody>
+      </p:sp>
+      <p:sp>
+        <p:nvSpPr>
+          <p:cNvPr id="23" name="Shape 21"/>
+          <p:cNvSpPr/>
+          <p:nvPr/>
+        </p:nvSpPr>
+        <p:spPr>
+          <a:xfrm>
+            <a:off x="6400800" y="2971800"/>
+            <a:ext cx="45720" cy="713232"/>
           </a:xfrm>
           <a:prstGeom prst="rect">
             <a:avLst/>
@@ -3930,14 +4645,14 @@
       </p:sp>
       <p:sp>
         <p:nvSpPr>
-          <p:cNvPr id="21" name="Text 19"/>
-          <p:cNvSpPr/>
-          <p:nvPr/>
-        </p:nvSpPr>
-        <p:spPr>
-          <a:xfrm>
-            <a:off x="6675120" y="2194560"/>
-            <a:ext cx="4572000" cy="256032"/>
+          <p:cNvPr id="24" name="Text 22"/>
+          <p:cNvSpPr/>
+          <p:nvPr/>
+        </p:nvSpPr>
+        <p:spPr>
+          <a:xfrm>
+            <a:off x="6675120" y="2971800"/>
+            <a:ext cx="4754880" cy="256032"/>
           </a:xfrm>
           <a:prstGeom prst="rect">
             <a:avLst/>
@@ -3961,7 +4676,7 @@
                 <a:ea typeface="Arial" pitchFamily="34" charset="-122"/>
                 <a:cs typeface="Arial" pitchFamily="34" charset="-120"/>
               </a:rPr>
-              <a:t>Tried to do everything alone</a:t>
+              <a:t>Lacked planning and coordination</a:t>
             </a:r>
             <a:endParaRPr lang="en-US" sz="1100" dirty="0"/>
           </a:p>
@@ -3969,14 +4684,14 @@
       </p:sp>
       <p:sp>
         <p:nvSpPr>
-          <p:cNvPr id="22" name="Text 20"/>
-          <p:cNvSpPr/>
-          <p:nvPr/>
-        </p:nvSpPr>
-        <p:spPr>
-          <a:xfrm>
-            <a:off x="6675120" y="2450592"/>
-            <a:ext cx="4572000" cy="384048"/>
+          <p:cNvPr id="25" name="Text 23"/>
+          <p:cNvSpPr/>
+          <p:nvPr/>
+        </p:nvSpPr>
+        <p:spPr>
+          <a:xfrm>
+            <a:off x="6675120" y="3246120"/>
+            <a:ext cx="4754880" cy="457200"/>
           </a:xfrm>
           <a:prstGeom prst="rect">
             <a:avLst/>
@@ -3990,7 +4705,7 @@
           <a:p>
             <a:pPr indent="0" marL="0">
               <a:lnSpc>
-                <a:spcPct val="110000"/>
+                <a:spcPct val="115000"/>
               </a:lnSpc>
               <a:buNone/>
             </a:pPr>
@@ -4003,7 +4718,7 @@
                 <a:ea typeface="Arial" pitchFamily="34" charset="-122"/>
                 <a:cs typeface="Arial" pitchFamily="34" charset="-120"/>
               </a:rPr>
-              <a:t>No partnerships, no collaboration model. Learned that ecosystem thinking requires ecosystem relationships.</a:t>
+              <a:t>Jumped into execution without systems thinking. Failed multiple times. That pain is exactly why the Pre-Build Gate and Orchestration Map exist now.</a:t>
             </a:r>
             <a:endParaRPr lang="en-US" sz="950" dirty="0"/>
           </a:p>
@@ -4011,34 +4726,34 @@
       </p:sp>
       <p:sp>
         <p:nvSpPr>
-          <p:cNvPr id="23" name="Shape 21"/>
-          <p:cNvSpPr/>
-          <p:nvPr/>
-        </p:nvSpPr>
-        <p:spPr>
-          <a:xfrm>
-            <a:off x="6400800" y="2971800"/>
-            <a:ext cx="36576" cy="640080"/>
+          <p:cNvPr id="26" name="Shape 24"/>
+          <p:cNvSpPr/>
+          <p:nvPr/>
+        </p:nvSpPr>
+        <p:spPr>
+          <a:xfrm>
+            <a:off x="6400800" y="3840480"/>
+            <a:ext cx="45720" cy="713232"/>
           </a:xfrm>
           <a:prstGeom prst="rect">
             <a:avLst/>
           </a:prstGeom>
           <a:solidFill>
-            <a:srgbClr val="F59E0B"/>
+            <a:srgbClr val="EF4444"/>
           </a:solidFill>
           <a:ln/>
         </p:spPr>
       </p:sp>
       <p:sp>
         <p:nvSpPr>
-          <p:cNvPr id="24" name="Text 22"/>
-          <p:cNvSpPr/>
-          <p:nvPr/>
-        </p:nvSpPr>
-        <p:spPr>
-          <a:xfrm>
-            <a:off x="6675120" y="2971800"/>
-            <a:ext cx="4572000" cy="256032"/>
+          <p:cNvPr id="27" name="Text 25"/>
+          <p:cNvSpPr/>
+          <p:nvPr/>
+        </p:nvSpPr>
+        <p:spPr>
+          <a:xfrm>
+            <a:off x="6675120" y="3840480"/>
+            <a:ext cx="4754880" cy="256032"/>
           </a:xfrm>
           <a:prstGeom prst="rect">
             <a:avLst/>
@@ -4070,14 +4785,14 @@
       </p:sp>
       <p:sp>
         <p:nvSpPr>
-          <p:cNvPr id="25" name="Text 23"/>
-          <p:cNvSpPr/>
-          <p:nvPr/>
-        </p:nvSpPr>
-        <p:spPr>
-          <a:xfrm>
-            <a:off x="6675120" y="3227832"/>
-            <a:ext cx="4572000" cy="384048"/>
+          <p:cNvPr id="28" name="Text 26"/>
+          <p:cNvSpPr/>
+          <p:nvPr/>
+        </p:nvSpPr>
+        <p:spPr>
+          <a:xfrm>
+            <a:off x="6675120" y="4114800"/>
+            <a:ext cx="4754880" cy="457200"/>
           </a:xfrm>
           <a:prstGeom prst="rect">
             <a:avLst/>
@@ -4091,7 +4806,7 @@
           <a:p>
             <a:pPr indent="0" marL="0">
               <a:lnSpc>
-                <a:spcPct val="110000"/>
+                <a:spcPct val="115000"/>
               </a:lnSpc>
               <a:buNone/>
             </a:pPr>
@@ -4104,108 +4819,7 @@
                 <a:ea typeface="Arial" pitchFamily="34" charset="-122"/>
                 <a:cs typeface="Arial" pitchFamily="34" charset="-120"/>
               </a:rPr>
-              <a:t>Gave away what Fortune 500 companies pay millions for. Still learning to charge what it's worth.</a:t>
-            </a:r>
-            <a:endParaRPr lang="en-US" sz="950" dirty="0"/>
-          </a:p>
-        </p:txBody>
-      </p:sp>
-      <p:sp>
-        <p:nvSpPr>
-          <p:cNvPr id="26" name="Shape 24"/>
-          <p:cNvSpPr/>
-          <p:nvPr/>
-        </p:nvSpPr>
-        <p:spPr>
-          <a:xfrm>
-            <a:off x="6400800" y="3749040"/>
-            <a:ext cx="36576" cy="640080"/>
-          </a:xfrm>
-          <a:prstGeom prst="rect">
-            <a:avLst/>
-          </a:prstGeom>
-          <a:solidFill>
-            <a:srgbClr val="F59E0B"/>
-          </a:solidFill>
-          <a:ln/>
-        </p:spPr>
-      </p:sp>
-      <p:sp>
-        <p:nvSpPr>
-          <p:cNvPr id="27" name="Text 25"/>
-          <p:cNvSpPr/>
-          <p:nvPr/>
-        </p:nvSpPr>
-        <p:spPr>
-          <a:xfrm>
-            <a:off x="6675120" y="3749040"/>
-            <a:ext cx="4572000" cy="256032"/>
-          </a:xfrm>
-          <a:prstGeom prst="rect">
-            <a:avLst/>
-          </a:prstGeom>
-          <a:noFill/>
-          <a:ln/>
-        </p:spPr>
-        <p:txBody>
-          <a:bodyPr wrap="square" rtlCol="0" anchor="ctr"/>
-          <a:lstStyle/>
-          <a:p>
-            <a:pPr indent="0" marL="0">
-              <a:buNone/>
-            </a:pPr>
-            <a:r>
-              <a:rPr lang="en-US" sz="1100" b="1" dirty="0">
-                <a:solidFill>
-                  <a:srgbClr val="FFFFFF"/>
-                </a:solidFill>
-                <a:latin typeface="Arial" pitchFamily="34" charset="0"/>
-                <a:ea typeface="Arial" pitchFamily="34" charset="-122"/>
-                <a:cs typeface="Arial" pitchFamily="34" charset="-120"/>
-              </a:rPr>
-              <a:t>Capital gap is real</a:t>
-            </a:r>
-            <a:endParaRPr lang="en-US" sz="1100" dirty="0"/>
-          </a:p>
-        </p:txBody>
-      </p:sp>
-      <p:sp>
-        <p:nvSpPr>
-          <p:cNvPr id="28" name="Text 26"/>
-          <p:cNvSpPr/>
-          <p:nvPr/>
-        </p:nvSpPr>
-        <p:spPr>
-          <a:xfrm>
-            <a:off x="6675120" y="4005072"/>
-            <a:ext cx="4572000" cy="384048"/>
-          </a:xfrm>
-          <a:prstGeom prst="rect">
-            <a:avLst/>
-          </a:prstGeom>
-          <a:noFill/>
-          <a:ln/>
-        </p:spPr>
-        <p:txBody>
-          <a:bodyPr wrap="square" rtlCol="0" anchor="ctr"/>
-          <a:lstStyle/>
-          <a:p>
-            <a:pPr indent="0" marL="0">
-              <a:lnSpc>
-                <a:spcPct val="110000"/>
-              </a:lnSpc>
-              <a:buNone/>
-            </a:pPr>
-            <a:r>
-              <a:rPr lang="en-US" sz="950" dirty="0">
-                <a:solidFill>
-                  <a:srgbClr val="94A3B8"/>
-                </a:solidFill>
-                <a:latin typeface="Arial" pitchFamily="34" charset="0"/>
-                <a:ea typeface="Arial" pitchFamily="34" charset="-122"/>
-                <a:cs typeface="Arial" pitchFamily="34" charset="-120"/>
-              </a:rPr>
-              <a:t>Grants keep the lights on but don't build scale. Need strategic capital partners — that's why we're here.</a:t>
+              <a:t>Gave away what Fortune 500 companies pay millions for. Learning to charge what it's worth is why I'm here.</a:t>
             </a:r>
             <a:endParaRPr lang="en-US" sz="950" dirty="0"/>
           </a:p>
@@ -4271,24 +4885,24 @@
         </p:nvSpPr>
         <p:spPr>
           <a:xfrm>
-            <a:off x="731520" y="365760"/>
-            <a:ext cx="10058400" cy="457200"/>
-          </a:xfrm>
-          <a:prstGeom prst="rect">
-            <a:avLst/>
-          </a:prstGeom>
-          <a:noFill/>
-          <a:ln/>
-        </p:spPr>
-        <p:txBody>
-          <a:bodyPr wrap="square" rtlCol="0" anchor="ctr"/>
-          <a:lstStyle/>
-          <a:p>
-            <a:pPr indent="0" marL="0">
-              <a:buNone/>
-            </a:pPr>
-            <a:r>
-              <a:rPr lang="en-US" sz="1400" b="1" dirty="0">
+            <a:off x="731520" y="320040"/>
+            <a:ext cx="10058400" cy="365760"/>
+          </a:xfrm>
+          <a:prstGeom prst="rect">
+            <a:avLst/>
+          </a:prstGeom>
+          <a:noFill/>
+          <a:ln/>
+        </p:spPr>
+        <p:txBody>
+          <a:bodyPr wrap="square" rtlCol="0" anchor="ctr"/>
+          <a:lstStyle/>
+          <a:p>
+            <a:pPr indent="0" marL="0">
+              <a:buNone/>
+            </a:pPr>
+            <a:r>
+              <a:rPr lang="en-US" sz="1300" b="1" dirty="0">
                 <a:solidFill>
                   <a:srgbClr val="2D7FF9"/>
                 </a:solidFill>
@@ -4298,7 +4912,7 @@
               </a:rPr>
               <a:t>THE ASK</a:t>
             </a:r>
-            <a:endParaRPr lang="en-US" sz="1400" dirty="0"/>
+            <a:endParaRPr lang="en-US" sz="1300" dirty="0"/>
           </a:p>
         </p:txBody>
       </p:sp>
@@ -4310,8 +4924,8 @@
         </p:nvSpPr>
         <p:spPr>
           <a:xfrm>
-            <a:off x="731520" y="822960"/>
-            <a:ext cx="10058400" cy="731520"/>
+            <a:off x="731520" y="731520"/>
+            <a:ext cx="10058400" cy="640080"/>
           </a:xfrm>
           <a:prstGeom prst="rect">
             <a:avLst/>
@@ -4330,7 +4944,7 @@
               <a:buNone/>
             </a:pPr>
             <a:r>
-              <a:rPr lang="en-US" sz="2000" b="1" dirty="0">
+              <a:rPr lang="en-US" sz="1900" b="1" dirty="0">
                 <a:solidFill>
                   <a:srgbClr val="FFFFFF"/>
                 </a:solidFill>
@@ -4340,7 +4954,7 @@
               </a:rPr>
               <a:t>MIT Sloan defines workforce ecosystems as the future.</a:t>
             </a:r>
-            <a:endParaRPr lang="en-US" sz="2000" dirty="0"/>
+            <a:endParaRPr lang="en-US" sz="1900" dirty="0"/>
           </a:p>
           <a:p>
             <a:pPr indent="0" marL="0">
@@ -4350,7 +4964,7 @@
               <a:buNone/>
             </a:pPr>
             <a:r>
-              <a:rPr lang="en-US" sz="2000" b="1" dirty="0">
+              <a:rPr lang="en-US" sz="1900" b="1" dirty="0">
                 <a:solidFill>
                   <a:srgbClr val="FFFFFF"/>
                 </a:solidFill>
@@ -4358,9 +4972,9 @@
                 <a:ea typeface="Arial" pitchFamily="34" charset="-122"/>
                 <a:cs typeface="Arial" pitchFamily="34" charset="-120"/>
               </a:rPr>
-              <a:t>We built one. Now we need the right partners to scale it.</a:t>
-            </a:r>
-            <a:endParaRPr lang="en-US" sz="2000" dirty="0"/>
+              <a:t>We already built one. We need partners to scale it.</a:t>
+            </a:r>
+            <a:endParaRPr lang="en-US" sz="1900" dirty="0"/>
           </a:p>
         </p:txBody>
       </p:sp>
@@ -4372,18 +4986,18 @@
         </p:nvSpPr>
         <p:spPr>
           <a:xfrm>
-            <a:off x="731520" y="1828800"/>
-            <a:ext cx="5029200" cy="2011680"/>
+            <a:off x="457200" y="1645920"/>
+            <a:ext cx="5486400" cy="2103120"/>
           </a:xfrm>
           <a:prstGeom prst="roundRect">
             <a:avLst>
-              <a:gd name="adj" fmla="val 3636"/>
+              <a:gd name="adj" fmla="val 3478"/>
             </a:avLst>
           </a:prstGeom>
           <a:solidFill>
             <a:srgbClr val="1A2332"/>
           </a:solidFill>
-          <a:ln w="12700">
+          <a:ln w="15240">
             <a:solidFill>
               <a:srgbClr val="2D7FF9"/>
             </a:solidFill>
@@ -4399,24 +5013,24 @@
         </p:nvSpPr>
         <p:spPr>
           <a:xfrm>
-            <a:off x="1005840" y="1920240"/>
-            <a:ext cx="4572000" cy="274320"/>
-          </a:xfrm>
-          <a:prstGeom prst="rect">
-            <a:avLst/>
-          </a:prstGeom>
-          <a:noFill/>
-          <a:ln/>
-        </p:spPr>
-        <p:txBody>
-          <a:bodyPr wrap="square" rtlCol="0" anchor="ctr"/>
-          <a:lstStyle/>
-          <a:p>
-            <a:pPr indent="0" marL="0">
-              <a:buNone/>
-            </a:pPr>
-            <a:r>
-              <a:rPr lang="en-US" sz="1100" b="1" dirty="0">
+            <a:off x="731520" y="1737360"/>
+            <a:ext cx="5029200" cy="228600"/>
+          </a:xfrm>
+          <a:prstGeom prst="rect">
+            <a:avLst/>
+          </a:prstGeom>
+          <a:noFill/>
+          <a:ln/>
+        </p:spPr>
+        <p:txBody>
+          <a:bodyPr wrap="square" rtlCol="0" anchor="ctr"/>
+          <a:lstStyle/>
+          <a:p>
+            <a:pPr indent="0" marL="0">
+              <a:buNone/>
+            </a:pPr>
+            <a:r>
+              <a:rPr lang="en-US" sz="1000" b="1" dirty="0">
                 <a:solidFill>
                   <a:srgbClr val="2D7FF9"/>
                 </a:solidFill>
@@ -4426,7 +5040,7 @@
               </a:rPr>
               <a:t>90-DAY GOAL #1</a:t>
             </a:r>
-            <a:endParaRPr lang="en-US" sz="1100" dirty="0"/>
+            <a:endParaRPr lang="en-US" sz="1000" dirty="0"/>
           </a:p>
         </p:txBody>
       </p:sp>
@@ -4438,8 +5052,8 @@
         </p:nvSpPr>
         <p:spPr>
           <a:xfrm>
-            <a:off x="1005840" y="2240280"/>
-            <a:ext cx="4572000" cy="411480"/>
+            <a:off x="731520" y="2011680"/>
+            <a:ext cx="5029200" cy="502920"/>
           </a:xfrm>
           <a:prstGeom prst="rect">
             <a:avLst/>
@@ -4453,12 +5067,12 @@
           <a:p>
             <a:pPr indent="0" marL="0">
               <a:lnSpc>
-                <a:spcPct val="110000"/>
+                <a:spcPct val="115000"/>
               </a:lnSpc>
               <a:buNone/>
             </a:pPr>
             <a:r>
-              <a:rPr lang="en-US" sz="1400" b="1" dirty="0">
+              <a:rPr lang="en-US" sz="1600" b="1" dirty="0">
                 <a:solidFill>
                   <a:srgbClr val="FFFFFF"/>
                 </a:solidFill>
@@ -4466,9 +5080,29 @@
                 <a:ea typeface="Arial" pitchFamily="34" charset="-122"/>
                 <a:cs typeface="Arial" pitchFamily="34" charset="-120"/>
               </a:rPr>
-              <a:t>Secure $1.5M–$2.5M in Enterprise / Government Contracts</a:t>
-            </a:r>
-            <a:endParaRPr lang="en-US" sz="1400" dirty="0"/>
+              <a:t>$1.5M–$2.5M in Enterprise</a:t>
+            </a:r>
+            <a:endParaRPr lang="en-US" sz="1600" dirty="0"/>
+          </a:p>
+          <a:p>
+            <a:pPr indent="0" marL="0">
+              <a:lnSpc>
+                <a:spcPct val="115000"/>
+              </a:lnSpc>
+              <a:buNone/>
+            </a:pPr>
+            <a:r>
+              <a:rPr lang="en-US" sz="1600" b="1" dirty="0">
+                <a:solidFill>
+                  <a:srgbClr val="FFFFFF"/>
+                </a:solidFill>
+                <a:latin typeface="Arial" pitchFamily="34" charset="0"/>
+                <a:ea typeface="Arial" pitchFamily="34" charset="-122"/>
+                <a:cs typeface="Arial" pitchFamily="34" charset="-120"/>
+              </a:rPr>
+              <a:t>or Government Contracts</a:t>
+            </a:r>
+            <a:endParaRPr lang="en-US" sz="1600" dirty="0"/>
           </a:p>
         </p:txBody>
       </p:sp>
@@ -4480,8 +5114,8 @@
         </p:nvSpPr>
         <p:spPr>
           <a:xfrm>
-            <a:off x="1005840" y="2697480"/>
-            <a:ext cx="4572000" cy="1005840"/>
+            <a:off x="731520" y="2606040"/>
+            <a:ext cx="5029200" cy="914400"/>
           </a:xfrm>
           <a:prstGeom prst="rect">
             <a:avLst/>
@@ -4495,7 +5129,7 @@
           <a:p>
             <a:pPr indent="0" marL="0">
               <a:lnSpc>
-                <a:spcPct val="120000"/>
+                <a:spcPct val="125000"/>
               </a:lnSpc>
               <a:buNone/>
             </a:pPr>
@@ -4508,7 +5142,7 @@
                 <a:ea typeface="Arial" pitchFamily="34" charset="-122"/>
                 <a:cs typeface="Arial" pitchFamily="34" charset="-120"/>
               </a:rPr>
-              <a:t>Deploy the ThriveUp ACOS ecosystem across 2-3 organizations in veteran transition, municipal workforce development, or Fortune 500 community investment programs. We have 4 active grants in pipeline and a live platform — we need strategic partners who can accelerate deployment at scale.</a:t>
+              <a:t>Deploy the ACOS ecosystem across 2-3 organizations in veteran transition, municipal workforce development, or Fortune 500 community investment. 4 active grants already in pipeline — we need strategic partners who accelerate deployment at scale.</a:t>
             </a:r>
             <a:endParaRPr lang="en-US" sz="1000" dirty="0"/>
           </a:p>
@@ -4522,18 +5156,18 @@
         </p:nvSpPr>
         <p:spPr>
           <a:xfrm>
-            <a:off x="6217920" y="1828800"/>
-            <a:ext cx="5029200" cy="2011680"/>
+            <a:off x="6217920" y="1645920"/>
+            <a:ext cx="5486400" cy="2103120"/>
           </a:xfrm>
           <a:prstGeom prst="roundRect">
             <a:avLst>
-              <a:gd name="adj" fmla="val 3636"/>
+              <a:gd name="adj" fmla="val 3478"/>
             </a:avLst>
           </a:prstGeom>
           <a:solidFill>
             <a:srgbClr val="1A2332"/>
           </a:solidFill>
-          <a:ln w="12700">
+          <a:ln w="15240">
             <a:solidFill>
               <a:srgbClr val="10B981"/>
             </a:solidFill>
@@ -4549,24 +5183,24 @@
         </p:nvSpPr>
         <p:spPr>
           <a:xfrm>
-            <a:off x="6492240" y="1920240"/>
-            <a:ext cx="4572000" cy="274320"/>
-          </a:xfrm>
-          <a:prstGeom prst="rect">
-            <a:avLst/>
-          </a:prstGeom>
-          <a:noFill/>
-          <a:ln/>
-        </p:spPr>
-        <p:txBody>
-          <a:bodyPr wrap="square" rtlCol="0" anchor="ctr"/>
-          <a:lstStyle/>
-          <a:p>
-            <a:pPr indent="0" marL="0">
-              <a:buNone/>
-            </a:pPr>
-            <a:r>
-              <a:rPr lang="en-US" sz="1100" b="1" dirty="0">
+            <a:off x="6492240" y="1737360"/>
+            <a:ext cx="5029200" cy="228600"/>
+          </a:xfrm>
+          <a:prstGeom prst="rect">
+            <a:avLst/>
+          </a:prstGeom>
+          <a:noFill/>
+          <a:ln/>
+        </p:spPr>
+        <p:txBody>
+          <a:bodyPr wrap="square" rtlCol="0" anchor="ctr"/>
+          <a:lstStyle/>
+          <a:p>
+            <a:pPr indent="0" marL="0">
+              <a:buNone/>
+            </a:pPr>
+            <a:r>
+              <a:rPr lang="en-US" sz="1000" b="1" dirty="0">
                 <a:solidFill>
                   <a:srgbClr val="10B981"/>
                 </a:solidFill>
@@ -4576,7 +5210,7 @@
               </a:rPr>
               <a:t>90-DAY GOAL #2</a:t>
             </a:r>
-            <a:endParaRPr lang="en-US" sz="1100" dirty="0"/>
+            <a:endParaRPr lang="en-US" sz="1000" dirty="0"/>
           </a:p>
         </p:txBody>
       </p:sp>
@@ -4588,8 +5222,8 @@
         </p:nvSpPr>
         <p:spPr>
           <a:xfrm>
-            <a:off x="6492240" y="2240280"/>
-            <a:ext cx="4572000" cy="411480"/>
+            <a:off x="6492240" y="2011680"/>
+            <a:ext cx="5029200" cy="502920"/>
           </a:xfrm>
           <a:prstGeom prst="rect">
             <a:avLst/>
@@ -4603,12 +5237,12 @@
           <a:p>
             <a:pPr indent="0" marL="0">
               <a:lnSpc>
-                <a:spcPct val="110000"/>
+                <a:spcPct val="115000"/>
               </a:lnSpc>
               <a:buNone/>
             </a:pPr>
             <a:r>
-              <a:rPr lang="en-US" sz="1400" b="1" dirty="0">
+              <a:rPr lang="en-US" sz="1600" b="1" dirty="0">
                 <a:solidFill>
                   <a:srgbClr val="FFFFFF"/>
                 </a:solidFill>
@@ -4616,9 +5250,29 @@
                 <a:ea typeface="Arial" pitchFamily="34" charset="-122"/>
                 <a:cs typeface="Arial" pitchFamily="34" charset="-120"/>
               </a:rPr>
-              <a:t>Strategic Partnerships for Government Modernization</a:t>
-            </a:r>
-            <a:endParaRPr lang="en-US" sz="1400" dirty="0"/>
+              <a:t>Strategic Partnerships for</a:t>
+            </a:r>
+            <a:endParaRPr lang="en-US" sz="1600" dirty="0"/>
+          </a:p>
+          <a:p>
+            <a:pPr indent="0" marL="0">
+              <a:lnSpc>
+                <a:spcPct val="115000"/>
+              </a:lnSpc>
+              <a:buNone/>
+            </a:pPr>
+            <a:r>
+              <a:rPr lang="en-US" sz="1600" b="1" dirty="0">
+                <a:solidFill>
+                  <a:srgbClr val="FFFFFF"/>
+                </a:solidFill>
+                <a:latin typeface="Arial" pitchFamily="34" charset="0"/>
+                <a:ea typeface="Arial" pitchFamily="34" charset="-122"/>
+                <a:cs typeface="Arial" pitchFamily="34" charset="-120"/>
+              </a:rPr>
+              <a:t>Government Modernization</a:t>
+            </a:r>
+            <a:endParaRPr lang="en-US" sz="1600" dirty="0"/>
           </a:p>
         </p:txBody>
       </p:sp>
@@ -4630,8 +5284,8 @@
         </p:nvSpPr>
         <p:spPr>
           <a:xfrm>
-            <a:off x="6492240" y="2697480"/>
-            <a:ext cx="4572000" cy="1005840"/>
+            <a:off x="6492240" y="2606040"/>
+            <a:ext cx="5029200" cy="914400"/>
           </a:xfrm>
           <a:prstGeom prst="rect">
             <a:avLst/>
@@ -4645,7 +5299,7 @@
           <a:p>
             <a:pPr indent="0" marL="0">
               <a:lnSpc>
-                <a:spcPct val="120000"/>
+                <a:spcPct val="125000"/>
               </a:lnSpc>
               <a:buNone/>
             </a:pPr>
@@ -4658,7 +5312,7 @@
                 <a:ea typeface="Arial" pitchFamily="34" charset="-122"/>
                 <a:cs typeface="Arial" pitchFamily="34" charset="-120"/>
               </a:rPr>
-              <a:t>Establish 2-3 partnerships with Fortune 500 companies or family offices to license the ACOS framework for government operations — city, state, and federal. The platform changes how governments coordinate workforce, emergency response, and community services. We need capital partners who can open doors to institutional deployment.</a:t>
+              <a:t>Establish 2-3 partnerships with Fortune 500 companies or family offices to license the ACOS framework for government operations — city, state, and federal. This platform changes how governments coordinate workforce, emergency response, and community services.</a:t>
             </a:r>
             <a:endParaRPr lang="en-US" sz="1000" dirty="0"/>
           </a:p>
@@ -4672,14 +5326,14 @@
         </p:nvSpPr>
         <p:spPr>
           <a:xfrm>
-            <a:off x="731520" y="4114800"/>
-            <a:ext cx="10515600" cy="36576"/>
+            <a:off x="457200" y="3977640"/>
+            <a:ext cx="11247120" cy="36576"/>
           </a:xfrm>
           <a:prstGeom prst="rect">
             <a:avLst/>
           </a:prstGeom>
           <a:solidFill>
-            <a:srgbClr val="2D7FF9"/>
+            <a:srgbClr val="F59E0B"/>
           </a:solidFill>
           <a:ln/>
         </p:spPr>
@@ -4692,8 +5346,207 @@
         </p:nvSpPr>
         <p:spPr>
           <a:xfrm>
-            <a:off x="731520" y="4297680"/>
-            <a:ext cx="10515600" cy="320040"/>
+            <a:off x="457200" y="4114800"/>
+            <a:ext cx="10972800" cy="228600"/>
+          </a:xfrm>
+          <a:prstGeom prst="rect">
+            <a:avLst/>
+          </a:prstGeom>
+          <a:noFill/>
+          <a:ln/>
+        </p:spPr>
+        <p:txBody>
+          <a:bodyPr wrap="square" rtlCol="0" anchor="ctr"/>
+          <a:lstStyle/>
+          <a:p>
+            <a:pPr indent="0" marL="0">
+              <a:buNone/>
+            </a:pPr>
+            <a:r>
+              <a:rPr lang="en-US" sz="1000" b="1" dirty="0">
+                <a:solidFill>
+                  <a:srgbClr val="F59E0B"/>
+                </a:solidFill>
+                <a:latin typeface="Arial" pitchFamily="34" charset="0"/>
+                <a:ea typeface="Arial" pitchFamily="34" charset="-122"/>
+                <a:cs typeface="Arial" pitchFamily="34" charset="-120"/>
+              </a:rPr>
+              <a:t>WHY THIS WORKS</a:t>
+            </a:r>
+            <a:endParaRPr lang="en-US" sz="1000" dirty="0"/>
+          </a:p>
+        </p:txBody>
+      </p:sp>
+      <p:sp>
+        <p:nvSpPr>
+          <p:cNvPr id="15" name="Text 13"/>
+          <p:cNvSpPr/>
+          <p:nvPr/>
+        </p:nvSpPr>
+        <p:spPr>
+          <a:xfrm>
+            <a:off x="457200" y="4389120"/>
+            <a:ext cx="2651760" cy="320040"/>
+          </a:xfrm>
+          <a:prstGeom prst="rect">
+            <a:avLst/>
+          </a:prstGeom>
+          <a:noFill/>
+          <a:ln/>
+        </p:spPr>
+        <p:txBody>
+          <a:bodyPr wrap="square" rtlCol="0" anchor="ctr"/>
+          <a:lstStyle/>
+          <a:p>
+            <a:pPr algn="ctr" marL="342900" indent="-342900">
+              <a:buSzPct val="100000"/>
+              <a:buChar char="✓"/>
+            </a:pPr>
+            <a:r>
+              <a:rPr lang="en-US" sz="900" dirty="0">
+                <a:solidFill>
+                  <a:srgbClr val="94A3B8"/>
+                </a:solidFill>
+                <a:latin typeface="Arial" pitchFamily="34" charset="0"/>
+                <a:ea typeface="Arial" pitchFamily="34" charset="-122"/>
+                <a:cs typeface="Arial" pitchFamily="34" charset="-120"/>
+              </a:rPr>
+              <a:t>We have a working system — not a pitch deck</a:t>
+            </a:r>
+            <a:endParaRPr lang="en-US" sz="900" dirty="0"/>
+          </a:p>
+        </p:txBody>
+      </p:sp>
+      <p:sp>
+        <p:nvSpPr>
+          <p:cNvPr id="16" name="Text 14"/>
+          <p:cNvSpPr/>
+          <p:nvPr/>
+        </p:nvSpPr>
+        <p:spPr>
+          <a:xfrm>
+            <a:off x="3291840" y="4389120"/>
+            <a:ext cx="2651760" cy="320040"/>
+          </a:xfrm>
+          <a:prstGeom prst="rect">
+            <a:avLst/>
+          </a:prstGeom>
+          <a:noFill/>
+          <a:ln/>
+        </p:spPr>
+        <p:txBody>
+          <a:bodyPr wrap="square" rtlCol="0" anchor="ctr"/>
+          <a:lstStyle/>
+          <a:p>
+            <a:pPr algn="ctr" marL="342900" indent="-342900">
+              <a:buSzPct val="100000"/>
+              <a:buChar char="✓"/>
+            </a:pPr>
+            <a:r>
+              <a:rPr lang="en-US" sz="900" dirty="0">
+                <a:solidFill>
+                  <a:srgbClr val="94A3B8"/>
+                </a:solidFill>
+                <a:latin typeface="Arial" pitchFamily="34" charset="0"/>
+                <a:ea typeface="Arial" pitchFamily="34" charset="-122"/>
+                <a:cs typeface="Arial" pitchFamily="34" charset="-120"/>
+              </a:rPr>
+              <a:t>AGOS partnership proves cross-ecosystem collaboration works</a:t>
+            </a:r>
+            <a:endParaRPr lang="en-US" sz="900" dirty="0"/>
+          </a:p>
+        </p:txBody>
+      </p:sp>
+      <p:sp>
+        <p:nvSpPr>
+          <p:cNvPr id="17" name="Text 15"/>
+          <p:cNvSpPr/>
+          <p:nvPr/>
+        </p:nvSpPr>
+        <p:spPr>
+          <a:xfrm>
+            <a:off x="6126480" y="4389120"/>
+            <a:ext cx="2651760" cy="320040"/>
+          </a:xfrm>
+          <a:prstGeom prst="rect">
+            <a:avLst/>
+          </a:prstGeom>
+          <a:noFill/>
+          <a:ln/>
+        </p:spPr>
+        <p:txBody>
+          <a:bodyPr wrap="square" rtlCol="0" anchor="ctr"/>
+          <a:lstStyle/>
+          <a:p>
+            <a:pPr algn="ctr" marL="342900" indent="-342900">
+              <a:buSzPct val="100000"/>
+              <a:buChar char="✓"/>
+            </a:pPr>
+            <a:r>
+              <a:rPr lang="en-US" sz="900" dirty="0">
+                <a:solidFill>
+                  <a:srgbClr val="94A3B8"/>
+                </a:solidFill>
+                <a:latin typeface="Arial" pitchFamily="34" charset="0"/>
+                <a:ea typeface="Arial" pitchFamily="34" charset="-122"/>
+                <a:cs typeface="Arial" pitchFamily="34" charset="-120"/>
+              </a:rPr>
+              <a:t>Shield Atlas proves we handle safety-critical operations</a:t>
+            </a:r>
+            <a:endParaRPr lang="en-US" sz="900" dirty="0"/>
+          </a:p>
+        </p:txBody>
+      </p:sp>
+      <p:sp>
+        <p:nvSpPr>
+          <p:cNvPr id="18" name="Text 16"/>
+          <p:cNvSpPr/>
+          <p:nvPr/>
+        </p:nvSpPr>
+        <p:spPr>
+          <a:xfrm>
+            <a:off x="8961120" y="4389120"/>
+            <a:ext cx="2651760" cy="320040"/>
+          </a:xfrm>
+          <a:prstGeom prst="rect">
+            <a:avLst/>
+          </a:prstGeom>
+          <a:noFill/>
+          <a:ln/>
+        </p:spPr>
+        <p:txBody>
+          <a:bodyPr wrap="square" rtlCol="0" anchor="ctr"/>
+          <a:lstStyle/>
+          <a:p>
+            <a:pPr algn="ctr" marL="342900" indent="-342900">
+              <a:buSzPct val="100000"/>
+              <a:buChar char="✓"/>
+            </a:pPr>
+            <a:r>
+              <a:rPr lang="en-US" sz="900" dirty="0">
+                <a:solidFill>
+                  <a:srgbClr val="94A3B8"/>
+                </a:solidFill>
+                <a:latin typeface="Arial" pitchFamily="34" charset="0"/>
+                <a:ea typeface="Arial" pitchFamily="34" charset="-122"/>
+                <a:cs typeface="Arial" pitchFamily="34" charset="-120"/>
+              </a:rPr>
+              <a:t>Every failure we had became a feature that prevents it from happening again</a:t>
+            </a:r>
+            <a:endParaRPr lang="en-US" sz="900" dirty="0"/>
+          </a:p>
+        </p:txBody>
+      </p:sp>
+      <p:sp>
+        <p:nvSpPr>
+          <p:cNvPr id="19" name="Text 17"/>
+          <p:cNvSpPr/>
+          <p:nvPr/>
+        </p:nvSpPr>
+        <p:spPr>
+          <a:xfrm>
+            <a:off x="457200" y="4754880"/>
+            <a:ext cx="11247120" cy="274320"/>
           </a:xfrm>
           <a:prstGeom prst="rect">
             <a:avLst/>
@@ -4709,7 +5562,21 @@
               <a:buNone/>
             </a:pPr>
             <a:r>
-              <a:rPr lang="en-US" sz="1100" dirty="0">
+              <a:rPr lang="en-US" sz="1000" dirty="0">
+                <a:solidFill>
+                  <a:srgbClr val="2D7FF9"/>
+                </a:solidFill>
+                <a:latin typeface="Arial" pitchFamily="34" charset="0"/>
+                <a:ea typeface="Arial" pitchFamily="34" charset="-122"/>
+                <a:cs typeface="Arial" pitchFamily="34" charset="-120"/>
+              </a:rPr>
+              <a:t>mr.terryflood@gmail.com</a:t>
+            </a:r>
+            <a:pPr algn="ctr" indent="0" marL="0">
+              <a:buNone/>
+            </a:pPr>
+            <a:r>
+              <a:rPr lang="en-US" sz="1000" dirty="0">
                 <a:solidFill>
                   <a:srgbClr val="94A3B8"/>
                 </a:solidFill>
@@ -4717,13 +5584,13 @@
                 <a:ea typeface="Arial" pitchFamily="34" charset="-122"/>
                 <a:cs typeface="Arial" pitchFamily="34" charset="-120"/>
               </a:rPr>
-              <a:t>Contact: </a:t>
+              <a:t>  |  </a:t>
             </a:r>
             <a:pPr algn="ctr" indent="0" marL="0">
               <a:buNone/>
             </a:pPr>
             <a:r>
-              <a:rPr lang="en-US" sz="1100" dirty="0">
+              <a:rPr lang="en-US" sz="1000" dirty="0">
                 <a:solidFill>
                   <a:srgbClr val="2D7FF9"/>
                 </a:solidFill>
@@ -4731,13 +5598,13 @@
                 <a:ea typeface="Arial" pitchFamily="34" charset="-122"/>
                 <a:cs typeface="Arial" pitchFamily="34" charset="-120"/>
               </a:rPr>
-              <a:t>mr.terryflood@gmail.com</a:t>
+              <a:t>thrivingcommunitiesforall.com</a:t>
             </a:r>
             <a:pPr algn="ctr" indent="0" marL="0">
               <a:buNone/>
             </a:pPr>
             <a:r>
-              <a:rPr lang="en-US" sz="1100" dirty="0">
+              <a:rPr lang="en-US" sz="1000" dirty="0">
                 <a:solidFill>
                   <a:srgbClr val="94A3B8"/>
                 </a:solidFill>
@@ -4745,13 +5612,13 @@
                 <a:ea typeface="Arial" pitchFamily="34" charset="-122"/>
                 <a:cs typeface="Arial" pitchFamily="34" charset="-120"/>
               </a:rPr>
-              <a:t>   |   Cash App: </a:t>
+              <a:t>  |  Cash App: </a:t>
             </a:r>
             <a:pPr algn="ctr" indent="0" marL="0">
               <a:buNone/>
             </a:pPr>
             <a:r>
-              <a:rPr lang="en-US" sz="1100" dirty="0">
+              <a:rPr lang="en-US" sz="1000" dirty="0">
                 <a:solidFill>
                   <a:srgbClr val="10B981"/>
                 </a:solidFill>
@@ -4765,7 +5632,7 @@
               <a:buNone/>
             </a:pPr>
             <a:r>
-              <a:rPr lang="en-US" sz="1100" dirty="0">
+              <a:rPr lang="en-US" sz="1000" dirty="0">
                 <a:solidFill>
                   <a:srgbClr val="94A3B8"/>
                 </a:solidFill>
@@ -4773,13 +5640,13 @@
                 <a:ea typeface="Arial" pitchFamily="34" charset="-122"/>
                 <a:cs typeface="Arial" pitchFamily="34" charset="-120"/>
               </a:rPr>
-              <a:t>   |   PayPal: </a:t>
+              <a:t>  |  PayPal: </a:t>
             </a:r>
             <a:pPr algn="ctr" indent="0" marL="0">
               <a:buNone/>
             </a:pPr>
             <a:r>
-              <a:rPr lang="en-US" sz="1100" dirty="0">
+              <a:rPr lang="en-US" sz="1000" dirty="0">
                 <a:solidFill>
                   <a:srgbClr val="10B981"/>
                 </a:solidFill>
@@ -4788,73 +5655,6 @@
                 <a:cs typeface="Arial" pitchFamily="34" charset="-120"/>
               </a:rPr>
               <a:t>paypal.me/TERRYFLOODCEO</a:t>
-            </a:r>
-            <a:pPr algn="ctr" indent="0" marL="0">
-              <a:buNone/>
-            </a:pPr>
-            <a:r>
-              <a:rPr lang="en-US" sz="1100" dirty="0">
-                <a:solidFill>
-                  <a:srgbClr val="94A3B8"/>
-                </a:solidFill>
-                <a:latin typeface="Arial" pitchFamily="34" charset="0"/>
-                <a:ea typeface="Arial" pitchFamily="34" charset="-122"/>
-                <a:cs typeface="Arial" pitchFamily="34" charset="-120"/>
-              </a:rPr>
-              <a:t>   |   </a:t>
-            </a:r>
-            <a:pPr algn="ctr" indent="0" marL="0">
-              <a:buNone/>
-            </a:pPr>
-            <a:r>
-              <a:rPr lang="en-US" sz="1100" dirty="0">
-                <a:solidFill>
-                  <a:srgbClr val="2D7FF9"/>
-                </a:solidFill>
-                <a:latin typeface="Arial" pitchFamily="34" charset="0"/>
-                <a:ea typeface="Arial" pitchFamily="34" charset="-122"/>
-                <a:cs typeface="Arial" pitchFamily="34" charset="-120"/>
-              </a:rPr>
-              <a:t>thrivingcommunitiesforall.com</a:t>
-            </a:r>
-            <a:endParaRPr lang="en-US" sz="1100" dirty="0"/>
-          </a:p>
-        </p:txBody>
-      </p:sp>
-      <p:sp>
-        <p:nvSpPr>
-          <p:cNvPr id="15" name="Text 13"/>
-          <p:cNvSpPr/>
-          <p:nvPr/>
-        </p:nvSpPr>
-        <p:spPr>
-          <a:xfrm>
-            <a:off x="1371600" y="4663440"/>
-            <a:ext cx="9144000" cy="320040"/>
-          </a:xfrm>
-          <a:prstGeom prst="rect">
-            <a:avLst/>
-          </a:prstGeom>
-          <a:noFill/>
-          <a:ln/>
-        </p:spPr>
-        <p:txBody>
-          <a:bodyPr wrap="square" rtlCol="0" anchor="ctr"/>
-          <a:lstStyle/>
-          <a:p>
-            <a:pPr algn="ctr" indent="0" marL="0">
-              <a:buNone/>
-            </a:pPr>
-            <a:r>
-              <a:rPr lang="en-US" sz="1000" i="1" dirty="0">
-                <a:solidFill>
-                  <a:srgbClr val="F59E0B"/>
-                </a:solidFill>
-                <a:latin typeface="Arial" pitchFamily="34" charset="0"/>
-                <a:ea typeface="Arial" pitchFamily="34" charset="-122"/>
-                <a:cs typeface="Arial" pitchFamily="34" charset="-120"/>
-              </a:rPr>
-              <a:t>"Collaborate to help Dr. Terry Flood be the best version of himself to help people be the best version of themselves."</a:t>
             </a:r>
             <a:endParaRPr lang="en-US" sz="1000" dirty="0"/>
           </a:p>
